--- a/assets/figures-editable/c1-c2/c1-e10.pptx
+++ b/assets/figures-editable/c1-c2/c1-e10.pptx
@@ -7,7 +7,7 @@
   <p:sldIdLst>
     <p:sldId id="256" r:id="rId7"/>
   </p:sldIdLst>
-  <p:sldSz cx="11948160" cy="7924799" type="screen4x3"/>
+  <p:sldSz cx="12191695" cy="6858000" type="screen4x3"/>
   <p:notesSz cx="6858000" cy="9144000"/>
   <p:defaultTextStyle>
     <a:defPPr>
@@ -3098,14 +3098,14 @@
       <p:grpSpPr/>
       <p:sp>
         <p:nvSpPr>
-          <p:cNvPr id="2" name="text1" descr="sci-ppt:C1-E10-001"/>
+          <p:cNvPr id="2" name="C1-E10 text 0" descr="sci-ppt:o000"/>
           <p:cNvSpPr txBox="1"/>
           <p:nvPr/>
         </p:nvSpPr>
         <p:spPr>
           <a:xfrm>
-            <a:off x="316992" y="268224"/>
-            <a:ext cx="11277600" cy="359054"/>
+            <a:off x="274320" y="118872"/>
+            <a:ext cx="11612880" cy="340105"/>
           </a:xfrm>
           <a:prstGeom prst="rect">
             <a:avLst/>
@@ -3114,7 +3114,7 @@
           <a:effectLst/>
         </p:spPr>
         <p:txBody>
-          <a:bodyPr wrap="none" lIns="27432" rIns="27432" tIns="18288" bIns="18288" anchor="ctr">
+          <a:bodyPr wrap="none" lIns="18288" rIns="18288" tIns="18288" bIns="18288" anchor="t">
             <a:spAutoFit/>
           </a:bodyPr>
           <a:lstStyle/>
@@ -3125,34 +3125,31 @@
               </a:spcAft>
             </a:pPr>
             <a:r>
-              <a:rPr sz="1823" b="0" i="0">
+              <a:rPr sz="1900" b="1" i="0">
                 <a:solidFill>
                   <a:srgbClr val="8EDBD4"/>
                 </a:solidFill>
                 <a:latin typeface="Arial"/>
               </a:rPr>
-              <a:t>C1-E10 | Physical-variable diagram</a:t>
-            </a:r>
-          </a:p>
-        </p:txBody>
-      </p:sp>
-      <p:sp>
-        <p:nvSpPr>
-          <p:cNvPr id="3" name="rect2" descr="sci-ppt:C1-E10-002"/>
-          <p:cNvSpPr/>
+              <a:t>C1-E10 · Exact product-rule derivatives</a:t>
+            </a:r>
+          </a:p>
+        </p:txBody>
+      </p:sp>
+      <p:cxnSp>
+        <p:nvCxnSpPr>
+          <p:cNvPr id="3" name="C1-E10 line 1" descr="sci-ppt:o001"/>
+          <p:cNvCxnSpPr/>
           <p:nvPr/>
-        </p:nvSpPr>
-        <p:spPr>
-          <a:xfrm>
-            <a:off x="609600" y="2011680"/>
-            <a:ext cx="3048000" cy="1280160"/>
-          </a:xfrm>
-          <a:prstGeom prst="rect">
+        </p:nvCxnSpPr>
+        <p:spPr>
+          <a:xfrm>
+            <a:off x="914400" y="4937760"/>
+            <a:ext cx="5120640" cy="0"/>
+          </a:xfrm>
+          <a:prstGeom prst="line">
             <a:avLst/>
           </a:prstGeom>
-          <a:solidFill>
-            <a:srgbClr val="213E4B"/>
-          </a:solidFill>
           <a:ln w="19050">
             <a:solidFill>
               <a:srgbClr val="B4C7D2"/>
@@ -3160,71 +3157,21 @@
           </a:ln>
           <a:effectLst/>
         </p:spPr>
-        <p:txBody>
-          <a:bodyPr rtlCol="0" anchor="ctr"/>
-          <a:lstStyle/>
-          <a:p>
-            <a:pPr algn="ctr"/>
-          </a:p>
-        </p:txBody>
-      </p:sp>
-      <p:sp>
-        <p:nvSpPr>
-          <p:cNvPr id="4" name="text3" descr="sci-ppt:C1-E10-003"/>
-          <p:cNvSpPr txBox="1"/>
+      </p:cxnSp>
+      <p:cxnSp>
+        <p:nvCxnSpPr>
+          <p:cNvPr id="4" name="C1-E10 line 2" descr="sci-ppt:o002"/>
+          <p:cNvCxnSpPr/>
           <p:nvPr/>
-        </p:nvSpPr>
-        <p:spPr>
-          <a:xfrm>
-            <a:off x="731520" y="2133600"/>
-            <a:ext cx="2865120" cy="340156"/>
-          </a:xfrm>
-          <a:prstGeom prst="rect">
+        </p:nvCxnSpPr>
+        <p:spPr>
+          <a:xfrm>
+            <a:off x="914400" y="1371600"/>
+            <a:ext cx="0" cy="3566160"/>
+          </a:xfrm>
+          <a:prstGeom prst="line">
             <a:avLst/>
           </a:prstGeom>
-          <a:noFill/>
-          <a:effectLst/>
-        </p:spPr>
-        <p:txBody>
-          <a:bodyPr wrap="none" lIns="27432" rIns="27432" tIns="18288" bIns="18288" anchor="ctr">
-            <a:spAutoFit/>
-          </a:bodyPr>
-          <a:lstStyle/>
-          <a:p>
-            <a:pPr algn="l">
-              <a:spcAft>
-                <a:spcPts val="0"/>
-              </a:spcAft>
-            </a:pPr>
-            <a:r>
-              <a:rPr sz="1728" b="0" i="0">
-                <a:solidFill>
-                  <a:srgbClr val="E7F0F3"/>
-                </a:solidFill>
-                <a:latin typeface="Arial"/>
-              </a:rPr>
-              <a:t>Pressure work</a:t>
-            </a:r>
-          </a:p>
-        </p:txBody>
-      </p:sp>
-      <p:sp>
-        <p:nvSpPr>
-          <p:cNvPr id="5" name="rect4" descr="sci-ppt:C1-E10-004"/>
-          <p:cNvSpPr/>
-          <p:nvPr/>
-        </p:nvSpPr>
-        <p:spPr>
-          <a:xfrm>
-            <a:off x="4511040" y="2011680"/>
-            <a:ext cx="3048000" cy="1280160"/>
-          </a:xfrm>
-          <a:prstGeom prst="rect">
-            <a:avLst/>
-          </a:prstGeom>
-          <a:solidFill>
-            <a:srgbClr val="213E4B"/>
-          </a:solidFill>
           <a:ln w="19050">
             <a:solidFill>
               <a:srgbClr val="B4C7D2"/>
@@ -3232,24 +3179,61 @@
           </a:ln>
           <a:effectLst/>
         </p:spPr>
-        <p:txBody>
-          <a:bodyPr rtlCol="0" anchor="ctr"/>
-          <a:lstStyle/>
-          <a:p>
-            <a:pPr algn="ctr"/>
-          </a:p>
-        </p:txBody>
-      </p:sp>
-      <p:sp>
-        <p:nvSpPr>
-          <p:cNvPr id="6" name="text5" descr="sci-ppt:C1-E10-005"/>
+      </p:cxnSp>
+      <p:cxnSp>
+        <p:nvCxnSpPr>
+          <p:cNvPr id="5" name="C1-E10 line 3" descr="sci-ppt:o003"/>
+          <p:cNvCxnSpPr/>
+          <p:nvPr/>
+        </p:nvCxnSpPr>
+        <p:spPr>
+          <a:xfrm>
+            <a:off x="914400" y="4937760"/>
+            <a:ext cx="0" cy="64008"/>
+          </a:xfrm>
+          <a:prstGeom prst="line">
+            <a:avLst/>
+          </a:prstGeom>
+          <a:ln w="12700">
+            <a:solidFill>
+              <a:srgbClr val="B4C7D2"/>
+            </a:solidFill>
+          </a:ln>
+          <a:effectLst/>
+        </p:spPr>
+      </p:cxnSp>
+      <p:cxnSp>
+        <p:nvCxnSpPr>
+          <p:cNvPr id="6" name="C1-E10 line 4" descr="sci-ppt:o004"/>
+          <p:cNvCxnSpPr/>
+          <p:nvPr/>
+        </p:nvCxnSpPr>
+        <p:spPr>
+          <a:xfrm>
+            <a:off x="914400" y="1371600"/>
+            <a:ext cx="0" cy="3566160"/>
+          </a:xfrm>
+          <a:prstGeom prst="line">
+            <a:avLst/>
+          </a:prstGeom>
+          <a:ln w="7620">
+            <a:solidFill>
+              <a:srgbClr val="2E4756"/>
+            </a:solidFill>
+          </a:ln>
+          <a:effectLst/>
+        </p:spPr>
+      </p:cxnSp>
+      <p:sp>
+        <p:nvSpPr>
+          <p:cNvPr id="7" name="C1-E10 text 5" descr="sci-ppt:o005"/>
           <p:cNvSpPr txBox="1"/>
           <p:nvPr/>
         </p:nvSpPr>
         <p:spPr>
           <a:xfrm>
-            <a:off x="4632960" y="2133600"/>
-            <a:ext cx="2865120" cy="340156"/>
+            <a:off x="457200" y="5020056"/>
+            <a:ext cx="914400" cy="208407"/>
           </a:xfrm>
           <a:prstGeom prst="rect">
             <a:avLst/>
@@ -3258,7 +3242,781 @@
           <a:effectLst/>
         </p:spPr>
         <p:txBody>
-          <a:bodyPr wrap="none" lIns="27432" rIns="27432" tIns="18288" bIns="18288" anchor="ctr">
+          <a:bodyPr wrap="none" lIns="18288" rIns="18288" tIns="18288" bIns="18288" anchor="t">
+            <a:spAutoFit/>
+          </a:bodyPr>
+          <a:lstStyle/>
+          <a:p>
+            <a:pPr algn="ctr">
+              <a:spcAft>
+                <a:spcPts val="0"/>
+              </a:spcAft>
+            </a:pPr>
+            <a:r>
+              <a:rPr sz="1050" b="0" i="0">
+                <a:solidFill>
+                  <a:srgbClr val="B4C7D2"/>
+                </a:solidFill>
+                <a:latin typeface="Arial"/>
+              </a:rPr>
+              <a:t>0.0</a:t>
+            </a:r>
+          </a:p>
+        </p:txBody>
+      </p:sp>
+      <p:cxnSp>
+        <p:nvCxnSpPr>
+          <p:cNvPr id="8" name="C1-E10 line 6" descr="sci-ppt:o006"/>
+          <p:cNvCxnSpPr/>
+          <p:nvPr/>
+        </p:nvCxnSpPr>
+        <p:spPr>
+          <a:xfrm>
+            <a:off x="2621279" y="4937760"/>
+            <a:ext cx="0" cy="64008"/>
+          </a:xfrm>
+          <a:prstGeom prst="line">
+            <a:avLst/>
+          </a:prstGeom>
+          <a:ln w="12700">
+            <a:solidFill>
+              <a:srgbClr val="B4C7D2"/>
+            </a:solidFill>
+          </a:ln>
+          <a:effectLst/>
+        </p:spPr>
+      </p:cxnSp>
+      <p:cxnSp>
+        <p:nvCxnSpPr>
+          <p:cNvPr id="9" name="C1-E10 line 7" descr="sci-ppt:o007"/>
+          <p:cNvCxnSpPr/>
+          <p:nvPr/>
+        </p:nvCxnSpPr>
+        <p:spPr>
+          <a:xfrm>
+            <a:off x="2621279" y="1371600"/>
+            <a:ext cx="0" cy="3566160"/>
+          </a:xfrm>
+          <a:prstGeom prst="line">
+            <a:avLst/>
+          </a:prstGeom>
+          <a:ln w="7620">
+            <a:solidFill>
+              <a:srgbClr val="2E4756"/>
+            </a:solidFill>
+          </a:ln>
+          <a:effectLst/>
+        </p:spPr>
+      </p:cxnSp>
+      <p:sp>
+        <p:nvSpPr>
+          <p:cNvPr id="10" name="C1-E10 text 8" descr="sci-ppt:o008"/>
+          <p:cNvSpPr txBox="1"/>
+          <p:nvPr/>
+        </p:nvSpPr>
+        <p:spPr>
+          <a:xfrm>
+            <a:off x="2164079" y="5020056"/>
+            <a:ext cx="914400" cy="208407"/>
+          </a:xfrm>
+          <a:prstGeom prst="rect">
+            <a:avLst/>
+          </a:prstGeom>
+          <a:noFill/>
+          <a:effectLst/>
+        </p:spPr>
+        <p:txBody>
+          <a:bodyPr wrap="none" lIns="18288" rIns="18288" tIns="18288" bIns="18288" anchor="t">
+            <a:spAutoFit/>
+          </a:bodyPr>
+          <a:lstStyle/>
+          <a:p>
+            <a:pPr algn="ctr">
+              <a:spcAft>
+                <a:spcPts val="0"/>
+              </a:spcAft>
+            </a:pPr>
+            <a:r>
+              <a:rPr sz="1050" b="0" i="0">
+                <a:solidFill>
+                  <a:srgbClr val="B4C7D2"/>
+                </a:solidFill>
+                <a:latin typeface="Arial"/>
+              </a:rPr>
+              <a:t>0.5</a:t>
+            </a:r>
+          </a:p>
+        </p:txBody>
+      </p:sp>
+      <p:cxnSp>
+        <p:nvCxnSpPr>
+          <p:cNvPr id="11" name="C1-E10 line 9" descr="sci-ppt:o009"/>
+          <p:cNvCxnSpPr/>
+          <p:nvPr/>
+        </p:nvCxnSpPr>
+        <p:spPr>
+          <a:xfrm>
+            <a:off x="4328159" y="4937760"/>
+            <a:ext cx="0" cy="64008"/>
+          </a:xfrm>
+          <a:prstGeom prst="line">
+            <a:avLst/>
+          </a:prstGeom>
+          <a:ln w="12700">
+            <a:solidFill>
+              <a:srgbClr val="B4C7D2"/>
+            </a:solidFill>
+          </a:ln>
+          <a:effectLst/>
+        </p:spPr>
+      </p:cxnSp>
+      <p:cxnSp>
+        <p:nvCxnSpPr>
+          <p:cNvPr id="12" name="C1-E10 line 10" descr="sci-ppt:o010"/>
+          <p:cNvCxnSpPr/>
+          <p:nvPr/>
+        </p:nvCxnSpPr>
+        <p:spPr>
+          <a:xfrm>
+            <a:off x="4328159" y="1371600"/>
+            <a:ext cx="0" cy="3566160"/>
+          </a:xfrm>
+          <a:prstGeom prst="line">
+            <a:avLst/>
+          </a:prstGeom>
+          <a:ln w="7620">
+            <a:solidFill>
+              <a:srgbClr val="2E4756"/>
+            </a:solidFill>
+          </a:ln>
+          <a:effectLst/>
+        </p:spPr>
+      </p:cxnSp>
+      <p:sp>
+        <p:nvSpPr>
+          <p:cNvPr id="13" name="C1-E10 text 11" descr="sci-ppt:o011"/>
+          <p:cNvSpPr txBox="1"/>
+          <p:nvPr/>
+        </p:nvSpPr>
+        <p:spPr>
+          <a:xfrm>
+            <a:off x="3870959" y="5020056"/>
+            <a:ext cx="914400" cy="208407"/>
+          </a:xfrm>
+          <a:prstGeom prst="rect">
+            <a:avLst/>
+          </a:prstGeom>
+          <a:noFill/>
+          <a:effectLst/>
+        </p:spPr>
+        <p:txBody>
+          <a:bodyPr wrap="none" lIns="18288" rIns="18288" tIns="18288" bIns="18288" anchor="t">
+            <a:spAutoFit/>
+          </a:bodyPr>
+          <a:lstStyle/>
+          <a:p>
+            <a:pPr algn="ctr">
+              <a:spcAft>
+                <a:spcPts val="0"/>
+              </a:spcAft>
+            </a:pPr>
+            <a:r>
+              <a:rPr sz="1050" b="0" i="0">
+                <a:solidFill>
+                  <a:srgbClr val="B4C7D2"/>
+                </a:solidFill>
+                <a:latin typeface="Arial"/>
+              </a:rPr>
+              <a:t>1.0</a:t>
+            </a:r>
+          </a:p>
+        </p:txBody>
+      </p:sp>
+      <p:cxnSp>
+        <p:nvCxnSpPr>
+          <p:cNvPr id="14" name="C1-E10 line 12" descr="sci-ppt:o012"/>
+          <p:cNvCxnSpPr/>
+          <p:nvPr/>
+        </p:nvCxnSpPr>
+        <p:spPr>
+          <a:xfrm>
+            <a:off x="6035040" y="4937760"/>
+            <a:ext cx="0" cy="64008"/>
+          </a:xfrm>
+          <a:prstGeom prst="line">
+            <a:avLst/>
+          </a:prstGeom>
+          <a:ln w="12700">
+            <a:solidFill>
+              <a:srgbClr val="B4C7D2"/>
+            </a:solidFill>
+          </a:ln>
+          <a:effectLst/>
+        </p:spPr>
+      </p:cxnSp>
+      <p:cxnSp>
+        <p:nvCxnSpPr>
+          <p:cNvPr id="15" name="C1-E10 line 13" descr="sci-ppt:o013"/>
+          <p:cNvCxnSpPr/>
+          <p:nvPr/>
+        </p:nvCxnSpPr>
+        <p:spPr>
+          <a:xfrm>
+            <a:off x="6035040" y="1371600"/>
+            <a:ext cx="0" cy="3566160"/>
+          </a:xfrm>
+          <a:prstGeom prst="line">
+            <a:avLst/>
+          </a:prstGeom>
+          <a:ln w="7620">
+            <a:solidFill>
+              <a:srgbClr val="2E4756"/>
+            </a:solidFill>
+          </a:ln>
+          <a:effectLst/>
+        </p:spPr>
+      </p:cxnSp>
+      <p:sp>
+        <p:nvSpPr>
+          <p:cNvPr id="16" name="C1-E10 text 14" descr="sci-ppt:o014"/>
+          <p:cNvSpPr txBox="1"/>
+          <p:nvPr/>
+        </p:nvSpPr>
+        <p:spPr>
+          <a:xfrm>
+            <a:off x="5577840" y="5020056"/>
+            <a:ext cx="914400" cy="208407"/>
+          </a:xfrm>
+          <a:prstGeom prst="rect">
+            <a:avLst/>
+          </a:prstGeom>
+          <a:noFill/>
+          <a:effectLst/>
+        </p:spPr>
+        <p:txBody>
+          <a:bodyPr wrap="none" lIns="18288" rIns="18288" tIns="18288" bIns="18288" anchor="t">
+            <a:spAutoFit/>
+          </a:bodyPr>
+          <a:lstStyle/>
+          <a:p>
+            <a:pPr algn="ctr">
+              <a:spcAft>
+                <a:spcPts val="0"/>
+              </a:spcAft>
+            </a:pPr>
+            <a:r>
+              <a:rPr sz="1050" b="0" i="0">
+                <a:solidFill>
+                  <a:srgbClr val="B4C7D2"/>
+                </a:solidFill>
+                <a:latin typeface="Arial"/>
+              </a:rPr>
+              <a:t>1.5</a:t>
+            </a:r>
+          </a:p>
+        </p:txBody>
+      </p:sp>
+      <p:cxnSp>
+        <p:nvCxnSpPr>
+          <p:cNvPr id="17" name="C1-E10 line 15" descr="sci-ppt:o015"/>
+          <p:cNvCxnSpPr/>
+          <p:nvPr/>
+        </p:nvCxnSpPr>
+        <p:spPr>
+          <a:xfrm>
+            <a:off x="850392" y="4937760"/>
+            <a:ext cx="64008" cy="0"/>
+          </a:xfrm>
+          <a:prstGeom prst="line">
+            <a:avLst/>
+          </a:prstGeom>
+          <a:ln w="12700">
+            <a:solidFill>
+              <a:srgbClr val="B4C7D2"/>
+            </a:solidFill>
+          </a:ln>
+          <a:effectLst/>
+        </p:spPr>
+      </p:cxnSp>
+      <p:cxnSp>
+        <p:nvCxnSpPr>
+          <p:cNvPr id="18" name="C1-E10 line 16" descr="sci-ppt:o016"/>
+          <p:cNvCxnSpPr/>
+          <p:nvPr/>
+        </p:nvCxnSpPr>
+        <p:spPr>
+          <a:xfrm>
+            <a:off x="850392" y="4224528"/>
+            <a:ext cx="64008" cy="0"/>
+          </a:xfrm>
+          <a:prstGeom prst="line">
+            <a:avLst/>
+          </a:prstGeom>
+          <a:ln w="12700">
+            <a:solidFill>
+              <a:srgbClr val="B4C7D2"/>
+            </a:solidFill>
+          </a:ln>
+          <a:effectLst/>
+        </p:spPr>
+      </p:cxnSp>
+      <p:cxnSp>
+        <p:nvCxnSpPr>
+          <p:cNvPr id="19" name="C1-E10 line 17" descr="sci-ppt:o017"/>
+          <p:cNvCxnSpPr/>
+          <p:nvPr/>
+        </p:nvCxnSpPr>
+        <p:spPr>
+          <a:xfrm>
+            <a:off x="914400" y="4224528"/>
+            <a:ext cx="5120640" cy="0"/>
+          </a:xfrm>
+          <a:prstGeom prst="line">
+            <a:avLst/>
+          </a:prstGeom>
+          <a:ln w="7620">
+            <a:solidFill>
+              <a:srgbClr val="2E4756"/>
+            </a:solidFill>
+          </a:ln>
+          <a:effectLst/>
+        </p:spPr>
+      </p:cxnSp>
+      <p:sp>
+        <p:nvSpPr>
+          <p:cNvPr id="20" name="C1-E10 text 18" descr="sci-ppt:o018"/>
+          <p:cNvSpPr txBox="1"/>
+          <p:nvPr/>
+        </p:nvSpPr>
+        <p:spPr>
+          <a:xfrm>
+            <a:off x="45720" y="4142232"/>
+            <a:ext cx="777240" cy="208407"/>
+          </a:xfrm>
+          <a:prstGeom prst="rect">
+            <a:avLst/>
+          </a:prstGeom>
+          <a:noFill/>
+          <a:effectLst/>
+        </p:spPr>
+        <p:txBody>
+          <a:bodyPr wrap="none" lIns="18288" rIns="18288" tIns="18288" bIns="18288" anchor="t">
+            <a:spAutoFit/>
+          </a:bodyPr>
+          <a:lstStyle/>
+          <a:p>
+            <a:pPr algn="r">
+              <a:spcAft>
+                <a:spcPts val="0"/>
+              </a:spcAft>
+            </a:pPr>
+            <a:r>
+              <a:rPr sz="1050" b="0" i="0">
+                <a:solidFill>
+                  <a:srgbClr val="B4C7D2"/>
+                </a:solidFill>
+                <a:latin typeface="Arial"/>
+              </a:rPr>
+              <a:t>0.08</a:t>
+            </a:r>
+          </a:p>
+        </p:txBody>
+      </p:sp>
+      <p:cxnSp>
+        <p:nvCxnSpPr>
+          <p:cNvPr id="21" name="C1-E10 line 19" descr="sci-ppt:o019"/>
+          <p:cNvCxnSpPr/>
+          <p:nvPr/>
+        </p:nvCxnSpPr>
+        <p:spPr>
+          <a:xfrm>
+            <a:off x="850392" y="3511296"/>
+            <a:ext cx="64008" cy="0"/>
+          </a:xfrm>
+          <a:prstGeom prst="line">
+            <a:avLst/>
+          </a:prstGeom>
+          <a:ln w="12700">
+            <a:solidFill>
+              <a:srgbClr val="B4C7D2"/>
+            </a:solidFill>
+          </a:ln>
+          <a:effectLst/>
+        </p:spPr>
+      </p:cxnSp>
+      <p:cxnSp>
+        <p:nvCxnSpPr>
+          <p:cNvPr id="22" name="C1-E10 line 20" descr="sci-ppt:o020"/>
+          <p:cNvCxnSpPr/>
+          <p:nvPr/>
+        </p:nvCxnSpPr>
+        <p:spPr>
+          <a:xfrm>
+            <a:off x="914400" y="3511296"/>
+            <a:ext cx="5120640" cy="0"/>
+          </a:xfrm>
+          <a:prstGeom prst="line">
+            <a:avLst/>
+          </a:prstGeom>
+          <a:ln w="7620">
+            <a:solidFill>
+              <a:srgbClr val="2E4756"/>
+            </a:solidFill>
+          </a:ln>
+          <a:effectLst/>
+        </p:spPr>
+      </p:cxnSp>
+      <p:sp>
+        <p:nvSpPr>
+          <p:cNvPr id="23" name="C1-E10 text 21" descr="sci-ppt:o021"/>
+          <p:cNvSpPr txBox="1"/>
+          <p:nvPr/>
+        </p:nvSpPr>
+        <p:spPr>
+          <a:xfrm>
+            <a:off x="45720" y="3429000"/>
+            <a:ext cx="777240" cy="208407"/>
+          </a:xfrm>
+          <a:prstGeom prst="rect">
+            <a:avLst/>
+          </a:prstGeom>
+          <a:noFill/>
+          <a:effectLst/>
+        </p:spPr>
+        <p:txBody>
+          <a:bodyPr wrap="none" lIns="18288" rIns="18288" tIns="18288" bIns="18288" anchor="t">
+            <a:spAutoFit/>
+          </a:bodyPr>
+          <a:lstStyle/>
+          <a:p>
+            <a:pPr algn="r">
+              <a:spcAft>
+                <a:spcPts val="0"/>
+              </a:spcAft>
+            </a:pPr>
+            <a:r>
+              <a:rPr sz="1050" b="0" i="0">
+                <a:solidFill>
+                  <a:srgbClr val="B4C7D2"/>
+                </a:solidFill>
+                <a:latin typeface="Arial"/>
+              </a:rPr>
+              <a:t>0.16</a:t>
+            </a:r>
+          </a:p>
+        </p:txBody>
+      </p:sp>
+      <p:cxnSp>
+        <p:nvCxnSpPr>
+          <p:cNvPr id="24" name="C1-E10 line 22" descr="sci-ppt:o022"/>
+          <p:cNvCxnSpPr/>
+          <p:nvPr/>
+        </p:nvCxnSpPr>
+        <p:spPr>
+          <a:xfrm>
+            <a:off x="850392" y="2798064"/>
+            <a:ext cx="64008" cy="0"/>
+          </a:xfrm>
+          <a:prstGeom prst="line">
+            <a:avLst/>
+          </a:prstGeom>
+          <a:ln w="12700">
+            <a:solidFill>
+              <a:srgbClr val="B4C7D2"/>
+            </a:solidFill>
+          </a:ln>
+          <a:effectLst/>
+        </p:spPr>
+      </p:cxnSp>
+      <p:cxnSp>
+        <p:nvCxnSpPr>
+          <p:cNvPr id="25" name="C1-E10 line 23" descr="sci-ppt:o023"/>
+          <p:cNvCxnSpPr/>
+          <p:nvPr/>
+        </p:nvCxnSpPr>
+        <p:spPr>
+          <a:xfrm>
+            <a:off x="914400" y="2798064"/>
+            <a:ext cx="5120640" cy="0"/>
+          </a:xfrm>
+          <a:prstGeom prst="line">
+            <a:avLst/>
+          </a:prstGeom>
+          <a:ln w="7620">
+            <a:solidFill>
+              <a:srgbClr val="2E4756"/>
+            </a:solidFill>
+          </a:ln>
+          <a:effectLst/>
+        </p:spPr>
+      </p:cxnSp>
+      <p:sp>
+        <p:nvSpPr>
+          <p:cNvPr id="26" name="C1-E10 text 24" descr="sci-ppt:o024"/>
+          <p:cNvSpPr txBox="1"/>
+          <p:nvPr/>
+        </p:nvSpPr>
+        <p:spPr>
+          <a:xfrm>
+            <a:off x="45720" y="2715768"/>
+            <a:ext cx="777240" cy="208407"/>
+          </a:xfrm>
+          <a:prstGeom prst="rect">
+            <a:avLst/>
+          </a:prstGeom>
+          <a:noFill/>
+          <a:effectLst/>
+        </p:spPr>
+        <p:txBody>
+          <a:bodyPr wrap="none" lIns="18288" rIns="18288" tIns="18288" bIns="18288" anchor="t">
+            <a:spAutoFit/>
+          </a:bodyPr>
+          <a:lstStyle/>
+          <a:p>
+            <a:pPr algn="r">
+              <a:spcAft>
+                <a:spcPts val="0"/>
+              </a:spcAft>
+            </a:pPr>
+            <a:r>
+              <a:rPr sz="1050" b="0" i="0">
+                <a:solidFill>
+                  <a:srgbClr val="B4C7D2"/>
+                </a:solidFill>
+                <a:latin typeface="Arial"/>
+              </a:rPr>
+              <a:t>0.24</a:t>
+            </a:r>
+          </a:p>
+        </p:txBody>
+      </p:sp>
+      <p:cxnSp>
+        <p:nvCxnSpPr>
+          <p:cNvPr id="27" name="C1-E10 line 25" descr="sci-ppt:o025"/>
+          <p:cNvCxnSpPr/>
+          <p:nvPr/>
+        </p:nvCxnSpPr>
+        <p:spPr>
+          <a:xfrm>
+            <a:off x="850392" y="2084832"/>
+            <a:ext cx="64008" cy="0"/>
+          </a:xfrm>
+          <a:prstGeom prst="line">
+            <a:avLst/>
+          </a:prstGeom>
+          <a:ln w="12700">
+            <a:solidFill>
+              <a:srgbClr val="B4C7D2"/>
+            </a:solidFill>
+          </a:ln>
+          <a:effectLst/>
+        </p:spPr>
+      </p:cxnSp>
+      <p:cxnSp>
+        <p:nvCxnSpPr>
+          <p:cNvPr id="28" name="C1-E10 line 26" descr="sci-ppt:o026"/>
+          <p:cNvCxnSpPr/>
+          <p:nvPr/>
+        </p:nvCxnSpPr>
+        <p:spPr>
+          <a:xfrm>
+            <a:off x="914400" y="2084832"/>
+            <a:ext cx="5120640" cy="0"/>
+          </a:xfrm>
+          <a:prstGeom prst="line">
+            <a:avLst/>
+          </a:prstGeom>
+          <a:ln w="7620">
+            <a:solidFill>
+              <a:srgbClr val="2E4756"/>
+            </a:solidFill>
+          </a:ln>
+          <a:effectLst/>
+        </p:spPr>
+      </p:cxnSp>
+      <p:sp>
+        <p:nvSpPr>
+          <p:cNvPr id="29" name="C1-E10 text 27" descr="sci-ppt:o027"/>
+          <p:cNvSpPr txBox="1"/>
+          <p:nvPr/>
+        </p:nvSpPr>
+        <p:spPr>
+          <a:xfrm>
+            <a:off x="45720" y="2002536"/>
+            <a:ext cx="777240" cy="208407"/>
+          </a:xfrm>
+          <a:prstGeom prst="rect">
+            <a:avLst/>
+          </a:prstGeom>
+          <a:noFill/>
+          <a:effectLst/>
+        </p:spPr>
+        <p:txBody>
+          <a:bodyPr wrap="none" lIns="18288" rIns="18288" tIns="18288" bIns="18288" anchor="t">
+            <a:spAutoFit/>
+          </a:bodyPr>
+          <a:lstStyle/>
+          <a:p>
+            <a:pPr algn="r">
+              <a:spcAft>
+                <a:spcPts val="0"/>
+              </a:spcAft>
+            </a:pPr>
+            <a:r>
+              <a:rPr sz="1050" b="0" i="0">
+                <a:solidFill>
+                  <a:srgbClr val="B4C7D2"/>
+                </a:solidFill>
+                <a:latin typeface="Arial"/>
+              </a:rPr>
+              <a:t>0.32</a:t>
+            </a:r>
+          </a:p>
+        </p:txBody>
+      </p:sp>
+      <p:cxnSp>
+        <p:nvCxnSpPr>
+          <p:cNvPr id="30" name="C1-E10 line 28" descr="sci-ppt:o028"/>
+          <p:cNvCxnSpPr/>
+          <p:nvPr/>
+        </p:nvCxnSpPr>
+        <p:spPr>
+          <a:xfrm>
+            <a:off x="850392" y="1371600"/>
+            <a:ext cx="64008" cy="0"/>
+          </a:xfrm>
+          <a:prstGeom prst="line">
+            <a:avLst/>
+          </a:prstGeom>
+          <a:ln w="12700">
+            <a:solidFill>
+              <a:srgbClr val="B4C7D2"/>
+            </a:solidFill>
+          </a:ln>
+          <a:effectLst/>
+        </p:spPr>
+      </p:cxnSp>
+      <p:cxnSp>
+        <p:nvCxnSpPr>
+          <p:cNvPr id="31" name="C1-E10 line 29" descr="sci-ppt:o029"/>
+          <p:cNvCxnSpPr/>
+          <p:nvPr/>
+        </p:nvCxnSpPr>
+        <p:spPr>
+          <a:xfrm>
+            <a:off x="914400" y="1371600"/>
+            <a:ext cx="5120640" cy="0"/>
+          </a:xfrm>
+          <a:prstGeom prst="line">
+            <a:avLst/>
+          </a:prstGeom>
+          <a:ln w="7620">
+            <a:solidFill>
+              <a:srgbClr val="2E4756"/>
+            </a:solidFill>
+          </a:ln>
+          <a:effectLst/>
+        </p:spPr>
+      </p:cxnSp>
+      <p:sp>
+        <p:nvSpPr>
+          <p:cNvPr id="32" name="C1-E10 text 30" descr="sci-ppt:o030"/>
+          <p:cNvSpPr txBox="1"/>
+          <p:nvPr/>
+        </p:nvSpPr>
+        <p:spPr>
+          <a:xfrm>
+            <a:off x="45720" y="1289304"/>
+            <a:ext cx="777240" cy="208407"/>
+          </a:xfrm>
+          <a:prstGeom prst="rect">
+            <a:avLst/>
+          </a:prstGeom>
+          <a:noFill/>
+          <a:effectLst/>
+        </p:spPr>
+        <p:txBody>
+          <a:bodyPr wrap="none" lIns="18288" rIns="18288" tIns="18288" bIns="18288" anchor="t">
+            <a:spAutoFit/>
+          </a:bodyPr>
+          <a:lstStyle/>
+          <a:p>
+            <a:pPr algn="r">
+              <a:spcAft>
+                <a:spcPts val="0"/>
+              </a:spcAft>
+            </a:pPr>
+            <a:r>
+              <a:rPr sz="1050" b="0" i="0">
+                <a:solidFill>
+                  <a:srgbClr val="B4C7D2"/>
+                </a:solidFill>
+                <a:latin typeface="Arial"/>
+              </a:rPr>
+              <a:t>0.40</a:t>
+            </a:r>
+          </a:p>
+        </p:txBody>
+      </p:sp>
+      <p:sp>
+        <p:nvSpPr>
+          <p:cNvPr id="33" name="C1-E10 text 31" descr="sci-ppt:o031"/>
+          <p:cNvSpPr txBox="1"/>
+          <p:nvPr/>
+        </p:nvSpPr>
+        <p:spPr>
+          <a:xfrm>
+            <a:off x="914400" y="5221224"/>
+            <a:ext cx="5120640" cy="231648"/>
+          </a:xfrm>
+          <a:prstGeom prst="rect">
+            <a:avLst/>
+          </a:prstGeom>
+          <a:noFill/>
+          <a:effectLst/>
+        </p:spPr>
+        <p:txBody>
+          <a:bodyPr wrap="none" lIns="18288" rIns="18288" tIns="18288" bIns="18288" anchor="t">
+            <a:spAutoFit/>
+          </a:bodyPr>
+          <a:lstStyle/>
+          <a:p>
+            <a:pPr algn="ctr">
+              <a:spcAft>
+                <a:spcPts val="0"/>
+              </a:spcAft>
+            </a:pPr>
+            <a:r>
+              <a:rPr sz="1200" b="0" i="0">
+                <a:solidFill>
+                  <a:srgbClr val="E7F0F3"/>
+                </a:solidFill>
+                <a:latin typeface="Arial"/>
+              </a:rPr>
+              <a:t>t  (µs)</a:t>
+            </a:r>
+          </a:p>
+        </p:txBody>
+      </p:sp>
+      <p:sp>
+        <p:nvSpPr>
+          <p:cNvPr id="34" name="C1-E10 text 32" descr="sci-ppt:o032"/>
+          <p:cNvSpPr txBox="1"/>
+          <p:nvPr/>
+        </p:nvSpPr>
+        <p:spPr>
+          <a:xfrm>
+            <a:off x="365760" y="1024128"/>
+            <a:ext cx="5120640" cy="231648"/>
+          </a:xfrm>
+          <a:prstGeom prst="rect">
+            <a:avLst/>
+          </a:prstGeom>
+          <a:noFill/>
+          <a:effectLst/>
+        </p:spPr>
+        <p:txBody>
+          <a:bodyPr wrap="none" lIns="18288" rIns="18288" tIns="18288" bIns="18288" anchor="t">
             <a:spAutoFit/>
           </a:bodyPr>
           <a:lstStyle/>
@@ -3269,34 +4027,1051 @@
               </a:spcAft>
             </a:pPr>
             <a:r>
-              <a:rPr sz="1728" b="0" i="0">
+              <a:rPr sz="1200" b="0" i="0">
                 <a:solidFill>
                   <a:srgbClr val="E7F0F3"/>
                 </a:solidFill>
                 <a:latin typeface="Arial"/>
               </a:rPr>
-              <a:t>K_l + E_σ</a:t>
-            </a:r>
-          </a:p>
-        </p:txBody>
-      </p:sp>
-      <p:sp>
-        <p:nvSpPr>
-          <p:cNvPr id="7" name="rect6" descr="sci-ppt:C1-E10-006"/>
+              <a:t>energy (nJ)</a:t>
+            </a:r>
+          </a:p>
+        </p:txBody>
+      </p:sp>
+      <p:sp>
+        <p:nvSpPr>
+          <p:cNvPr id="35" name="C1-E10 polygon 33" descr="sci-ppt:o033"/>
           <p:cNvSpPr/>
           <p:nvPr/>
         </p:nvSpPr>
         <p:spPr>
           <a:xfrm>
-            <a:off x="8412480" y="2011680"/>
-            <a:ext cx="2926080" cy="1280160"/>
+            <a:off x="914400" y="1772947"/>
+            <a:ext cx="5120640" cy="3164813"/>
+          </a:xfrm>
+          <a:custGeom>
+            <a:avLst/>
+            <a:gdLst/>
+            <a:ahLst/>
+            <a:cxnLst/>
+            <a:rect l="l" t="t" r="r" b="b"/>
+            <a:pathLst>
+              <a:path w="5120640" h="3164813">
+                <a:moveTo>
+                  <a:pt x="0" y="3164813"/>
+                </a:moveTo>
+                <a:lnTo>
+                  <a:pt x="35853" y="3141602"/>
+                </a:lnTo>
+                <a:lnTo>
+                  <a:pt x="71706" y="3073616"/>
+                </a:lnTo>
+                <a:lnTo>
+                  <a:pt x="107560" y="2965301"/>
+                </a:lnTo>
+                <a:lnTo>
+                  <a:pt x="143413" y="2823140"/>
+                </a:lnTo>
+                <a:lnTo>
+                  <a:pt x="179267" y="2654763"/>
+                </a:lnTo>
+                <a:lnTo>
+                  <a:pt x="215120" y="2468061"/>
+                </a:lnTo>
+                <a:lnTo>
+                  <a:pt x="250974" y="2270471"/>
+                </a:lnTo>
+                <a:lnTo>
+                  <a:pt x="286827" y="2068508"/>
+                </a:lnTo>
+                <a:lnTo>
+                  <a:pt x="322680" y="1867536"/>
+                </a:lnTo>
+                <a:lnTo>
+                  <a:pt x="358534" y="1671734"/>
+                </a:lnTo>
+                <a:lnTo>
+                  <a:pt x="394387" y="1484184"/>
+                </a:lnTo>
+                <a:lnTo>
+                  <a:pt x="430241" y="1307019"/>
+                </a:lnTo>
+                <a:lnTo>
+                  <a:pt x="466094" y="1141602"/>
+                </a:lnTo>
+                <a:lnTo>
+                  <a:pt x="501948" y="988687"/>
+                </a:lnTo>
+                <a:lnTo>
+                  <a:pt x="537801" y="848574"/>
+                </a:lnTo>
+                <a:lnTo>
+                  <a:pt x="573655" y="721230"/>
+                </a:lnTo>
+                <a:lnTo>
+                  <a:pt x="609508" y="606383"/>
+                </a:lnTo>
+                <a:lnTo>
+                  <a:pt x="645361" y="503606"/>
+                </a:lnTo>
+                <a:lnTo>
+                  <a:pt x="681215" y="412368"/>
+                </a:lnTo>
+                <a:lnTo>
+                  <a:pt x="717068" y="332078"/>
+                </a:lnTo>
+                <a:lnTo>
+                  <a:pt x="752922" y="262119"/>
+                </a:lnTo>
+                <a:lnTo>
+                  <a:pt x="788775" y="201865"/>
+                </a:lnTo>
+                <a:lnTo>
+                  <a:pt x="824629" y="150698"/>
+                </a:lnTo>
+                <a:lnTo>
+                  <a:pt x="860482" y="108019"/>
+                </a:lnTo>
+                <a:lnTo>
+                  <a:pt x="896336" y="73253"/>
+                </a:lnTo>
+                <a:lnTo>
+                  <a:pt x="932189" y="45851"/>
+                </a:lnTo>
+                <a:lnTo>
+                  <a:pt x="968042" y="25297"/>
+                </a:lnTo>
+                <a:lnTo>
+                  <a:pt x="1003896" y="11104"/>
+                </a:lnTo>
+                <a:lnTo>
+                  <a:pt x="1039749" y="2814"/>
+                </a:lnTo>
+                <a:lnTo>
+                  <a:pt x="1075603" y="0"/>
+                </a:lnTo>
+                <a:lnTo>
+                  <a:pt x="1111456" y="2264"/>
+                </a:lnTo>
+                <a:lnTo>
+                  <a:pt x="1147310" y="9231"/>
+                </a:lnTo>
+                <a:lnTo>
+                  <a:pt x="1183163" y="20555"/>
+                </a:lnTo>
+                <a:lnTo>
+                  <a:pt x="1219017" y="35912"/>
+                </a:lnTo>
+                <a:lnTo>
+                  <a:pt x="1254870" y="54997"/>
+                </a:lnTo>
+                <a:lnTo>
+                  <a:pt x="1290723" y="77531"/>
+                </a:lnTo>
+                <a:lnTo>
+                  <a:pt x="1326577" y="103249"/>
+                </a:lnTo>
+                <a:lnTo>
+                  <a:pt x="1362430" y="131906"/>
+                </a:lnTo>
+                <a:lnTo>
+                  <a:pt x="1398284" y="163271"/>
+                </a:lnTo>
+                <a:lnTo>
+                  <a:pt x="1434137" y="197130"/>
+                </a:lnTo>
+                <a:lnTo>
+                  <a:pt x="1469991" y="233282"/>
+                </a:lnTo>
+                <a:lnTo>
+                  <a:pt x="1505844" y="271539"/>
+                </a:lnTo>
+                <a:lnTo>
+                  <a:pt x="1541698" y="311723"/>
+                </a:lnTo>
+                <a:lnTo>
+                  <a:pt x="1577551" y="353670"/>
+                </a:lnTo>
+                <a:lnTo>
+                  <a:pt x="1613404" y="397223"/>
+                </a:lnTo>
+                <a:lnTo>
+                  <a:pt x="1649258" y="442236"/>
+                </a:lnTo>
+                <a:lnTo>
+                  <a:pt x="1685111" y="488572"/>
+                </a:lnTo>
+                <a:lnTo>
+                  <a:pt x="1720965" y="536101"/>
+                </a:lnTo>
+                <a:lnTo>
+                  <a:pt x="1756818" y="584700"/>
+                </a:lnTo>
+                <a:lnTo>
+                  <a:pt x="1792672" y="634254"/>
+                </a:lnTo>
+                <a:lnTo>
+                  <a:pt x="1828525" y="684654"/>
+                </a:lnTo>
+                <a:lnTo>
+                  <a:pt x="1864379" y="735797"/>
+                </a:lnTo>
+                <a:lnTo>
+                  <a:pt x="1900232" y="787586"/>
+                </a:lnTo>
+                <a:lnTo>
+                  <a:pt x="1936085" y="839928"/>
+                </a:lnTo>
+                <a:lnTo>
+                  <a:pt x="1971939" y="892736"/>
+                </a:lnTo>
+                <a:lnTo>
+                  <a:pt x="2007792" y="945926"/>
+                </a:lnTo>
+                <a:lnTo>
+                  <a:pt x="2043646" y="999421"/>
+                </a:lnTo>
+                <a:lnTo>
+                  <a:pt x="2079499" y="1053144"/>
+                </a:lnTo>
+                <a:lnTo>
+                  <a:pt x="2115353" y="1107026"/>
+                </a:lnTo>
+                <a:lnTo>
+                  <a:pt x="2151206" y="1160998"/>
+                </a:lnTo>
+                <a:lnTo>
+                  <a:pt x="2187060" y="1214996"/>
+                </a:lnTo>
+                <a:lnTo>
+                  <a:pt x="2222913" y="1268959"/>
+                </a:lnTo>
+                <a:lnTo>
+                  <a:pt x="2258766" y="1322828"/>
+                </a:lnTo>
+                <a:lnTo>
+                  <a:pt x="2294620" y="1376548"/>
+                </a:lnTo>
+                <a:lnTo>
+                  <a:pt x="2330473" y="1430066"/>
+                </a:lnTo>
+                <a:lnTo>
+                  <a:pt x="2366327" y="1483330"/>
+                </a:lnTo>
+                <a:lnTo>
+                  <a:pt x="2402180" y="1536293"/>
+                </a:lnTo>
+                <a:lnTo>
+                  <a:pt x="2438034" y="1588908"/>
+                </a:lnTo>
+                <a:lnTo>
+                  <a:pt x="2473887" y="1641131"/>
+                </a:lnTo>
+                <a:lnTo>
+                  <a:pt x="2509741" y="1692919"/>
+                </a:lnTo>
+                <a:lnTo>
+                  <a:pt x="2545594" y="1744233"/>
+                </a:lnTo>
+                <a:lnTo>
+                  <a:pt x="2581447" y="1795033"/>
+                </a:lnTo>
+                <a:lnTo>
+                  <a:pt x="2617301" y="1845283"/>
+                </a:lnTo>
+                <a:lnTo>
+                  <a:pt x="2653154" y="1894947"/>
+                </a:lnTo>
+                <a:lnTo>
+                  <a:pt x="2689008" y="1943991"/>
+                </a:lnTo>
+                <a:lnTo>
+                  <a:pt x="2724861" y="1992382"/>
+                </a:lnTo>
+                <a:lnTo>
+                  <a:pt x="2760715" y="2040091"/>
+                </a:lnTo>
+                <a:lnTo>
+                  <a:pt x="2796568" y="2087086"/>
+                </a:lnTo>
+                <a:lnTo>
+                  <a:pt x="2832422" y="2133340"/>
+                </a:lnTo>
+                <a:lnTo>
+                  <a:pt x="2868275" y="2178824"/>
+                </a:lnTo>
+                <a:lnTo>
+                  <a:pt x="2904128" y="2223514"/>
+                </a:lnTo>
+                <a:lnTo>
+                  <a:pt x="2939982" y="2267383"/>
+                </a:lnTo>
+                <a:lnTo>
+                  <a:pt x="2975835" y="2310407"/>
+                </a:lnTo>
+                <a:lnTo>
+                  <a:pt x="3011689" y="2352565"/>
+                </a:lnTo>
+                <a:lnTo>
+                  <a:pt x="3047542" y="2393833"/>
+                </a:lnTo>
+                <a:lnTo>
+                  <a:pt x="3083396" y="2434191"/>
+                </a:lnTo>
+                <a:lnTo>
+                  <a:pt x="3119249" y="2473618"/>
+                </a:lnTo>
+                <a:lnTo>
+                  <a:pt x="3155103" y="2512095"/>
+                </a:lnTo>
+                <a:lnTo>
+                  <a:pt x="3190956" y="2549604"/>
+                </a:lnTo>
+                <a:lnTo>
+                  <a:pt x="3226809" y="2586127"/>
+                </a:lnTo>
+                <a:lnTo>
+                  <a:pt x="3262663" y="2621648"/>
+                </a:lnTo>
+                <a:lnTo>
+                  <a:pt x="3298516" y="2656150"/>
+                </a:lnTo>
+                <a:lnTo>
+                  <a:pt x="3334370" y="2689617"/>
+                </a:lnTo>
+                <a:lnTo>
+                  <a:pt x="3370223" y="2722036"/>
+                </a:lnTo>
+                <a:lnTo>
+                  <a:pt x="3406077" y="2753393"/>
+                </a:lnTo>
+                <a:lnTo>
+                  <a:pt x="3441930" y="2783674"/>
+                </a:lnTo>
+                <a:lnTo>
+                  <a:pt x="3477784" y="2812866"/>
+                </a:lnTo>
+                <a:lnTo>
+                  <a:pt x="3513637" y="2840959"/>
+                </a:lnTo>
+                <a:lnTo>
+                  <a:pt x="3549490" y="2867940"/>
+                </a:lnTo>
+                <a:lnTo>
+                  <a:pt x="3585344" y="2893799"/>
+                </a:lnTo>
+                <a:lnTo>
+                  <a:pt x="3621197" y="2918527"/>
+                </a:lnTo>
+                <a:lnTo>
+                  <a:pt x="3657051" y="2942112"/>
+                </a:lnTo>
+                <a:lnTo>
+                  <a:pt x="3692904" y="2964548"/>
+                </a:lnTo>
+                <a:lnTo>
+                  <a:pt x="3728758" y="2985825"/>
+                </a:lnTo>
+                <a:lnTo>
+                  <a:pt x="3764611" y="3005935"/>
+                </a:lnTo>
+                <a:lnTo>
+                  <a:pt x="3800464" y="3024872"/>
+                </a:lnTo>
+                <a:lnTo>
+                  <a:pt x="3836318" y="3042629"/>
+                </a:lnTo>
+                <a:lnTo>
+                  <a:pt x="3872171" y="3059199"/>
+                </a:lnTo>
+                <a:lnTo>
+                  <a:pt x="3908025" y="3074578"/>
+                </a:lnTo>
+                <a:lnTo>
+                  <a:pt x="3943878" y="3088760"/>
+                </a:lnTo>
+                <a:lnTo>
+                  <a:pt x="3979732" y="3101740"/>
+                </a:lnTo>
+                <a:lnTo>
+                  <a:pt x="4015585" y="3113514"/>
+                </a:lnTo>
+                <a:lnTo>
+                  <a:pt x="4051439" y="3124079"/>
+                </a:lnTo>
+                <a:lnTo>
+                  <a:pt x="4087292" y="3133431"/>
+                </a:lnTo>
+                <a:lnTo>
+                  <a:pt x="4123145" y="3141569"/>
+                </a:lnTo>
+                <a:lnTo>
+                  <a:pt x="4158999" y="3148490"/>
+                </a:lnTo>
+                <a:lnTo>
+                  <a:pt x="4194852" y="3154191"/>
+                </a:lnTo>
+                <a:lnTo>
+                  <a:pt x="4230706" y="3158673"/>
+                </a:lnTo>
+                <a:lnTo>
+                  <a:pt x="4266559" y="3161935"/>
+                </a:lnTo>
+                <a:lnTo>
+                  <a:pt x="4302413" y="3163975"/>
+                </a:lnTo>
+                <a:lnTo>
+                  <a:pt x="4338266" y="3164795"/>
+                </a:lnTo>
+                <a:lnTo>
+                  <a:pt x="4374120" y="3164394"/>
+                </a:lnTo>
+                <a:lnTo>
+                  <a:pt x="4409973" y="3162775"/>
+                </a:lnTo>
+                <a:lnTo>
+                  <a:pt x="4445826" y="3159939"/>
+                </a:lnTo>
+                <a:lnTo>
+                  <a:pt x="4481680" y="3155888"/>
+                </a:lnTo>
+                <a:lnTo>
+                  <a:pt x="4517533" y="3150625"/>
+                </a:lnTo>
+                <a:lnTo>
+                  <a:pt x="4553387" y="3144152"/>
+                </a:lnTo>
+                <a:lnTo>
+                  <a:pt x="4589240" y="3136473"/>
+                </a:lnTo>
+                <a:lnTo>
+                  <a:pt x="4625094" y="3127593"/>
+                </a:lnTo>
+                <a:lnTo>
+                  <a:pt x="4660947" y="3117515"/>
+                </a:lnTo>
+                <a:lnTo>
+                  <a:pt x="4696801" y="3106246"/>
+                </a:lnTo>
+                <a:lnTo>
+                  <a:pt x="4732654" y="3093789"/>
+                </a:lnTo>
+                <a:lnTo>
+                  <a:pt x="4768507" y="3080152"/>
+                </a:lnTo>
+                <a:lnTo>
+                  <a:pt x="4804361" y="3065340"/>
+                </a:lnTo>
+                <a:lnTo>
+                  <a:pt x="4840214" y="3049361"/>
+                </a:lnTo>
+                <a:lnTo>
+                  <a:pt x="4876068" y="3032222"/>
+                </a:lnTo>
+                <a:lnTo>
+                  <a:pt x="4911921" y="3013931"/>
+                </a:lnTo>
+                <a:lnTo>
+                  <a:pt x="4947775" y="2994496"/>
+                </a:lnTo>
+                <a:lnTo>
+                  <a:pt x="4983628" y="2973928"/>
+                </a:lnTo>
+                <a:lnTo>
+                  <a:pt x="5019482" y="2952234"/>
+                </a:lnTo>
+                <a:lnTo>
+                  <a:pt x="5055335" y="2929426"/>
+                </a:lnTo>
+                <a:lnTo>
+                  <a:pt x="5091188" y="2905515"/>
+                </a:lnTo>
+                <a:lnTo>
+                  <a:pt x="5120640" y="2885055"/>
+                </a:lnTo>
+              </a:path>
+            </a:pathLst>
+          </a:custGeom>
+          <a:noFill/>
+          <a:ln w="35560">
+            <a:solidFill>
+              <a:srgbClr val="8EDBD4"/>
+            </a:solidFill>
+          </a:ln>
+          <a:effectLst/>
+        </p:spPr>
+        <p:txBody>
+          <a:bodyPr rtlCol="0" anchor="ctr"/>
+          <a:lstStyle/>
+          <a:p>
+            <a:pPr algn="ctr"/>
+          </a:p>
+        </p:txBody>
+      </p:sp>
+      <p:sp>
+        <p:nvSpPr>
+          <p:cNvPr id="36" name="C1-E10 polygon 34" descr="sci-ppt:o034"/>
+          <p:cNvSpPr/>
+          <p:nvPr/>
+        </p:nvSpPr>
+        <p:spPr>
+          <a:xfrm>
+            <a:off x="914400" y="3729421"/>
+            <a:ext cx="5120640" cy="1006677"/>
+          </a:xfrm>
+          <a:custGeom>
+            <a:avLst/>
+            <a:gdLst/>
+            <a:ahLst/>
+            <a:cxnLst/>
+            <a:rect l="l" t="t" r="r" b="b"/>
+            <a:pathLst>
+              <a:path w="5120640" h="1006677">
+                <a:moveTo>
+                  <a:pt x="0" y="1006677"/>
+                </a:moveTo>
+                <a:lnTo>
+                  <a:pt x="35853" y="1005905"/>
+                </a:lnTo>
+                <a:lnTo>
+                  <a:pt x="71706" y="1003607"/>
+                </a:lnTo>
+                <a:lnTo>
+                  <a:pt x="107560" y="999835"/>
+                </a:lnTo>
+                <a:lnTo>
+                  <a:pt x="143413" y="994668"/>
+                </a:lnTo>
+                <a:lnTo>
+                  <a:pt x="179267" y="988205"/>
+                </a:lnTo>
+                <a:lnTo>
+                  <a:pt x="215120" y="980559"/>
+                </a:lnTo>
+                <a:lnTo>
+                  <a:pt x="250974" y="971850"/>
+                </a:lnTo>
+                <a:lnTo>
+                  <a:pt x="286827" y="962198"/>
+                </a:lnTo>
+                <a:lnTo>
+                  <a:pt x="322680" y="951717"/>
+                </a:lnTo>
+                <a:lnTo>
+                  <a:pt x="358534" y="940518"/>
+                </a:lnTo>
+                <a:lnTo>
+                  <a:pt x="394387" y="928701"/>
+                </a:lnTo>
+                <a:lnTo>
+                  <a:pt x="430241" y="916357"/>
+                </a:lnTo>
+                <a:lnTo>
+                  <a:pt x="466094" y="903567"/>
+                </a:lnTo>
+                <a:lnTo>
+                  <a:pt x="501948" y="890403"/>
+                </a:lnTo>
+                <a:lnTo>
+                  <a:pt x="537801" y="876930"/>
+                </a:lnTo>
+                <a:lnTo>
+                  <a:pt x="573655" y="863203"/>
+                </a:lnTo>
+                <a:lnTo>
+                  <a:pt x="609508" y="849271"/>
+                </a:lnTo>
+                <a:lnTo>
+                  <a:pt x="645361" y="835178"/>
+                </a:lnTo>
+                <a:lnTo>
+                  <a:pt x="681215" y="820962"/>
+                </a:lnTo>
+                <a:lnTo>
+                  <a:pt x="717068" y="806654"/>
+                </a:lnTo>
+                <a:lnTo>
+                  <a:pt x="752922" y="792284"/>
+                </a:lnTo>
+                <a:lnTo>
+                  <a:pt x="788775" y="777877"/>
+                </a:lnTo>
+                <a:lnTo>
+                  <a:pt x="824629" y="763455"/>
+                </a:lnTo>
+                <a:lnTo>
+                  <a:pt x="860482" y="749038"/>
+                </a:lnTo>
+                <a:lnTo>
+                  <a:pt x="896336" y="734642"/>
+                </a:lnTo>
+                <a:lnTo>
+                  <a:pt x="932189" y="720284"/>
+                </a:lnTo>
+                <a:lnTo>
+                  <a:pt x="968042" y="705976"/>
+                </a:lnTo>
+                <a:lnTo>
+                  <a:pt x="1003896" y="691730"/>
+                </a:lnTo>
+                <a:lnTo>
+                  <a:pt x="1039749" y="677556"/>
+                </a:lnTo>
+                <a:lnTo>
+                  <a:pt x="1075603" y="663464"/>
+                </a:lnTo>
+                <a:lnTo>
+                  <a:pt x="1111456" y="649462"/>
+                </a:lnTo>
+                <a:lnTo>
+                  <a:pt x="1147310" y="635558"/>
+                </a:lnTo>
+                <a:lnTo>
+                  <a:pt x="1183163" y="621757"/>
+                </a:lnTo>
+                <a:lnTo>
+                  <a:pt x="1219017" y="608066"/>
+                </a:lnTo>
+                <a:lnTo>
+                  <a:pt x="1254870" y="594490"/>
+                </a:lnTo>
+                <a:lnTo>
+                  <a:pt x="1290723" y="581034"/>
+                </a:lnTo>
+                <a:lnTo>
+                  <a:pt x="1326577" y="567702"/>
+                </a:lnTo>
+                <a:lnTo>
+                  <a:pt x="1362430" y="554497"/>
+                </a:lnTo>
+                <a:lnTo>
+                  <a:pt x="1398284" y="541423"/>
+                </a:lnTo>
+                <a:lnTo>
+                  <a:pt x="1434137" y="528484"/>
+                </a:lnTo>
+                <a:lnTo>
+                  <a:pt x="1469991" y="515682"/>
+                </a:lnTo>
+                <a:lnTo>
+                  <a:pt x="1505844" y="503018"/>
+                </a:lnTo>
+                <a:lnTo>
+                  <a:pt x="1541698" y="490497"/>
+                </a:lnTo>
+                <a:lnTo>
+                  <a:pt x="1577551" y="478119"/>
+                </a:lnTo>
+                <a:lnTo>
+                  <a:pt x="1613404" y="465886"/>
+                </a:lnTo>
+                <a:lnTo>
+                  <a:pt x="1649258" y="453801"/>
+                </a:lnTo>
+                <a:lnTo>
+                  <a:pt x="1685111" y="441864"/>
+                </a:lnTo>
+                <a:lnTo>
+                  <a:pt x="1720965" y="430077"/>
+                </a:lnTo>
+                <a:lnTo>
+                  <a:pt x="1756818" y="418442"/>
+                </a:lnTo>
+                <a:lnTo>
+                  <a:pt x="1792672" y="406958"/>
+                </a:lnTo>
+                <a:lnTo>
+                  <a:pt x="1828525" y="395628"/>
+                </a:lnTo>
+                <a:lnTo>
+                  <a:pt x="1864379" y="384452"/>
+                </a:lnTo>
+                <a:lnTo>
+                  <a:pt x="1900232" y="373431"/>
+                </a:lnTo>
+                <a:lnTo>
+                  <a:pt x="1936085" y="362566"/>
+                </a:lnTo>
+                <a:lnTo>
+                  <a:pt x="1971939" y="351857"/>
+                </a:lnTo>
+                <a:lnTo>
+                  <a:pt x="2007792" y="341305"/>
+                </a:lnTo>
+                <a:lnTo>
+                  <a:pt x="2043646" y="330910"/>
+                </a:lnTo>
+                <a:lnTo>
+                  <a:pt x="2079499" y="320674"/>
+                </a:lnTo>
+                <a:lnTo>
+                  <a:pt x="2115353" y="310596"/>
+                </a:lnTo>
+                <a:lnTo>
+                  <a:pt x="2151206" y="300677"/>
+                </a:lnTo>
+                <a:lnTo>
+                  <a:pt x="2187060" y="290918"/>
+                </a:lnTo>
+                <a:lnTo>
+                  <a:pt x="2222913" y="281317"/>
+                </a:lnTo>
+                <a:lnTo>
+                  <a:pt x="2258766" y="271877"/>
+                </a:lnTo>
+                <a:lnTo>
+                  <a:pt x="2294620" y="262597"/>
+                </a:lnTo>
+                <a:lnTo>
+                  <a:pt x="2330473" y="253477"/>
+                </a:lnTo>
+                <a:lnTo>
+                  <a:pt x="2366327" y="244517"/>
+                </a:lnTo>
+                <a:lnTo>
+                  <a:pt x="2402180" y="235719"/>
+                </a:lnTo>
+                <a:lnTo>
+                  <a:pt x="2438034" y="227081"/>
+                </a:lnTo>
+                <a:lnTo>
+                  <a:pt x="2473887" y="218604"/>
+                </a:lnTo>
+                <a:lnTo>
+                  <a:pt x="2509741" y="210288"/>
+                </a:lnTo>
+                <a:lnTo>
+                  <a:pt x="2545594" y="202134"/>
+                </a:lnTo>
+                <a:lnTo>
+                  <a:pt x="2581447" y="194141"/>
+                </a:lnTo>
+                <a:lnTo>
+                  <a:pt x="2617301" y="186309"/>
+                </a:lnTo>
+                <a:lnTo>
+                  <a:pt x="2653154" y="178638"/>
+                </a:lnTo>
+                <a:lnTo>
+                  <a:pt x="2689008" y="171129"/>
+                </a:lnTo>
+                <a:lnTo>
+                  <a:pt x="2724861" y="163782"/>
+                </a:lnTo>
+                <a:lnTo>
+                  <a:pt x="2760715" y="156596"/>
+                </a:lnTo>
+                <a:lnTo>
+                  <a:pt x="2796568" y="149572"/>
+                </a:lnTo>
+                <a:lnTo>
+                  <a:pt x="2832422" y="142709"/>
+                </a:lnTo>
+                <a:lnTo>
+                  <a:pt x="2868275" y="136008"/>
+                </a:lnTo>
+                <a:lnTo>
+                  <a:pt x="2904128" y="129469"/>
+                </a:lnTo>
+                <a:lnTo>
+                  <a:pt x="2939982" y="123091"/>
+                </a:lnTo>
+                <a:lnTo>
+                  <a:pt x="2975835" y="116875"/>
+                </a:lnTo>
+                <a:lnTo>
+                  <a:pt x="3011689" y="110820"/>
+                </a:lnTo>
+                <a:lnTo>
+                  <a:pt x="3047542" y="104927"/>
+                </a:lnTo>
+                <a:lnTo>
+                  <a:pt x="3083396" y="99195"/>
+                </a:lnTo>
+                <a:lnTo>
+                  <a:pt x="3119249" y="93625"/>
+                </a:lnTo>
+                <a:lnTo>
+                  <a:pt x="3155103" y="88216"/>
+                </a:lnTo>
+                <a:lnTo>
+                  <a:pt x="3190956" y="82969"/>
+                </a:lnTo>
+                <a:lnTo>
+                  <a:pt x="3226809" y="77883"/>
+                </a:lnTo>
+                <a:lnTo>
+                  <a:pt x="3262663" y="72958"/>
+                </a:lnTo>
+                <a:lnTo>
+                  <a:pt x="3298516" y="68195"/>
+                </a:lnTo>
+                <a:lnTo>
+                  <a:pt x="3334370" y="63593"/>
+                </a:lnTo>
+                <a:lnTo>
+                  <a:pt x="3370223" y="59152"/>
+                </a:lnTo>
+                <a:lnTo>
+                  <a:pt x="3406077" y="54872"/>
+                </a:lnTo>
+                <a:lnTo>
+                  <a:pt x="3441930" y="50753"/>
+                </a:lnTo>
+                <a:lnTo>
+                  <a:pt x="3477784" y="46796"/>
+                </a:lnTo>
+                <a:lnTo>
+                  <a:pt x="3513637" y="42999"/>
+                </a:lnTo>
+                <a:lnTo>
+                  <a:pt x="3549490" y="39364"/>
+                </a:lnTo>
+                <a:lnTo>
+                  <a:pt x="3585344" y="35889"/>
+                </a:lnTo>
+                <a:lnTo>
+                  <a:pt x="3621197" y="32575"/>
+                </a:lnTo>
+                <a:lnTo>
+                  <a:pt x="3657051" y="29422"/>
+                </a:lnTo>
+                <a:lnTo>
+                  <a:pt x="3692904" y="26430"/>
+                </a:lnTo>
+                <a:lnTo>
+                  <a:pt x="3728758" y="23598"/>
+                </a:lnTo>
+                <a:lnTo>
+                  <a:pt x="3764611" y="20927"/>
+                </a:lnTo>
+                <a:lnTo>
+                  <a:pt x="3800464" y="18417"/>
+                </a:lnTo>
+                <a:lnTo>
+                  <a:pt x="3836318" y="16067"/>
+                </a:lnTo>
+                <a:lnTo>
+                  <a:pt x="3872171" y="13878"/>
+                </a:lnTo>
+                <a:lnTo>
+                  <a:pt x="3908025" y="11849"/>
+                </a:lnTo>
+                <a:lnTo>
+                  <a:pt x="3943878" y="9981"/>
+                </a:lnTo>
+                <a:lnTo>
+                  <a:pt x="3979732" y="8273"/>
+                </a:lnTo>
+                <a:lnTo>
+                  <a:pt x="4015585" y="6725"/>
+                </a:lnTo>
+                <a:lnTo>
+                  <a:pt x="4051439" y="5337"/>
+                </a:lnTo>
+                <a:lnTo>
+                  <a:pt x="4087292" y="4110"/>
+                </a:lnTo>
+                <a:lnTo>
+                  <a:pt x="4123145" y="3043"/>
+                </a:lnTo>
+                <a:lnTo>
+                  <a:pt x="4158999" y="2135"/>
+                </a:lnTo>
+                <a:lnTo>
+                  <a:pt x="4194852" y="1388"/>
+                </a:lnTo>
+                <a:lnTo>
+                  <a:pt x="4230706" y="801"/>
+                </a:lnTo>
+                <a:lnTo>
+                  <a:pt x="4266559" y="374"/>
+                </a:lnTo>
+                <a:lnTo>
+                  <a:pt x="4302413" y="107"/>
+                </a:lnTo>
+                <a:lnTo>
+                  <a:pt x="4338266" y="0"/>
+                </a:lnTo>
+                <a:lnTo>
+                  <a:pt x="4374120" y="52"/>
+                </a:lnTo>
+                <a:lnTo>
+                  <a:pt x="4409973" y="264"/>
+                </a:lnTo>
+                <a:lnTo>
+                  <a:pt x="4445826" y="636"/>
+                </a:lnTo>
+                <a:lnTo>
+                  <a:pt x="4481680" y="1168"/>
+                </a:lnTo>
+                <a:lnTo>
+                  <a:pt x="4517533" y="1859"/>
+                </a:lnTo>
+                <a:lnTo>
+                  <a:pt x="4553387" y="2710"/>
+                </a:lnTo>
+                <a:lnTo>
+                  <a:pt x="4589240" y="3720"/>
+                </a:lnTo>
+                <a:lnTo>
+                  <a:pt x="4625094" y="4890"/>
+                </a:lnTo>
+                <a:lnTo>
+                  <a:pt x="4660947" y="6220"/>
+                </a:lnTo>
+                <a:lnTo>
+                  <a:pt x="4696801" y="7709"/>
+                </a:lnTo>
+                <a:lnTo>
+                  <a:pt x="4732654" y="9357"/>
+                </a:lnTo>
+                <a:lnTo>
+                  <a:pt x="4768507" y="11164"/>
+                </a:lnTo>
+                <a:lnTo>
+                  <a:pt x="4804361" y="13131"/>
+                </a:lnTo>
+                <a:lnTo>
+                  <a:pt x="4840214" y="15257"/>
+                </a:lnTo>
+                <a:lnTo>
+                  <a:pt x="4876068" y="17543"/>
+                </a:lnTo>
+                <a:lnTo>
+                  <a:pt x="4911921" y="19987"/>
+                </a:lnTo>
+                <a:lnTo>
+                  <a:pt x="4947775" y="22591"/>
+                </a:lnTo>
+                <a:lnTo>
+                  <a:pt x="4983628" y="25354"/>
+                </a:lnTo>
+                <a:lnTo>
+                  <a:pt x="5019482" y="28275"/>
+                </a:lnTo>
+                <a:lnTo>
+                  <a:pt x="5055335" y="31356"/>
+                </a:lnTo>
+                <a:lnTo>
+                  <a:pt x="5091188" y="34596"/>
+                </a:lnTo>
+                <a:lnTo>
+                  <a:pt x="5120640" y="37376"/>
+                </a:lnTo>
+              </a:path>
+            </a:pathLst>
+          </a:custGeom>
+          <a:noFill/>
+          <a:ln w="35560">
+            <a:solidFill>
+              <a:srgbClr val="F28BA0"/>
+            </a:solidFill>
+          </a:ln>
+          <a:effectLst/>
+        </p:spPr>
+        <p:txBody>
+          <a:bodyPr rtlCol="0" anchor="ctr"/>
+          <a:lstStyle/>
+          <a:p>
+            <a:pPr algn="ctr"/>
+          </a:p>
+        </p:txBody>
+      </p:sp>
+      <p:sp>
+        <p:nvSpPr>
+          <p:cNvPr id="37" name="C1-E10 text 35" descr="sci-ppt:o035"/>
+          <p:cNvSpPr txBox="1"/>
+          <p:nvPr/>
+        </p:nvSpPr>
+        <p:spPr>
+          <a:xfrm>
+            <a:off x="3035808" y="1387144"/>
+            <a:ext cx="2926080" cy="231648"/>
           </a:xfrm>
           <a:prstGeom prst="rect">
             <a:avLst/>
           </a:prstGeom>
-          <a:solidFill>
-            <a:srgbClr val="213E4B"/>
-          </a:solidFill>
+          <a:noFill/>
+          <a:effectLst/>
+        </p:spPr>
+        <p:txBody>
+          <a:bodyPr wrap="none" lIns="18288" rIns="18288" tIns="18288" bIns="18288" anchor="t">
+            <a:spAutoFit/>
+          </a:bodyPr>
+          <a:lstStyle/>
+          <a:p>
+            <a:pPr algn="l">
+              <a:spcAft>
+                <a:spcPts val="0"/>
+              </a:spcAft>
+            </a:pPr>
+            <a:r>
+              <a:rPr sz="1200" b="0" i="0">
+                <a:solidFill>
+                  <a:srgbClr val="8EDBD4"/>
+                </a:solidFill>
+                <a:latin typeface="Arial"/>
+              </a:rPr>
+              <a:t>liquid kinetic energy Kₗ = 2πρR³Ṙ²</a:t>
+            </a:r>
+          </a:p>
+        </p:txBody>
+      </p:sp>
+      <p:sp>
+        <p:nvSpPr>
+          <p:cNvPr id="38" name="C1-E10 text 36" descr="sci-ppt:o036"/>
+          <p:cNvSpPr txBox="1"/>
+          <p:nvPr/>
+        </p:nvSpPr>
+        <p:spPr>
+          <a:xfrm>
+            <a:off x="3035808" y="1993391"/>
+            <a:ext cx="2926080" cy="231648"/>
+          </a:xfrm>
+          <a:prstGeom prst="rect">
+            <a:avLst/>
+          </a:prstGeom>
+          <a:noFill/>
+          <a:effectLst/>
+        </p:spPr>
+        <p:txBody>
+          <a:bodyPr wrap="none" lIns="18288" rIns="18288" tIns="18288" bIns="18288" anchor="t">
+            <a:spAutoFit/>
+          </a:bodyPr>
+          <a:lstStyle/>
+          <a:p>
+            <a:pPr algn="l">
+              <a:spcAft>
+                <a:spcPts val="0"/>
+              </a:spcAft>
+            </a:pPr>
+            <a:r>
+              <a:rPr sz="1200" b="0" i="0">
+                <a:solidFill>
+                  <a:srgbClr val="F28BA0"/>
+                </a:solidFill>
+                <a:latin typeface="Arial"/>
+              </a:rPr>
+              <a:t>interface energy E_σ = 4πσR²</a:t>
+            </a:r>
+          </a:p>
+        </p:txBody>
+      </p:sp>
+      <p:cxnSp>
+        <p:nvCxnSpPr>
+          <p:cNvPr id="39" name="C1-E10 line 37" descr="sci-ppt:o037"/>
+          <p:cNvCxnSpPr/>
+          <p:nvPr/>
+        </p:nvCxnSpPr>
+        <p:spPr>
+          <a:xfrm>
+            <a:off x="6675120" y="4937760"/>
+            <a:ext cx="5120639" cy="0"/>
+          </a:xfrm>
+          <a:prstGeom prst="line">
+            <a:avLst/>
+          </a:prstGeom>
           <a:ln w="19050">
             <a:solidFill>
               <a:srgbClr val="B4C7D2"/>
@@ -3304,24 +5079,83 @@
           </a:ln>
           <a:effectLst/>
         </p:spPr>
-        <p:txBody>
-          <a:bodyPr rtlCol="0" anchor="ctr"/>
-          <a:lstStyle/>
-          <a:p>
-            <a:pPr algn="ctr"/>
-          </a:p>
-        </p:txBody>
-      </p:sp>
-      <p:sp>
-        <p:nvSpPr>
-          <p:cNvPr id="8" name="text7" descr="sci-ppt:C1-E10-007"/>
+      </p:cxnSp>
+      <p:cxnSp>
+        <p:nvCxnSpPr>
+          <p:cNvPr id="40" name="C1-E10 line 38" descr="sci-ppt:o038"/>
+          <p:cNvCxnSpPr/>
+          <p:nvPr/>
+        </p:nvCxnSpPr>
+        <p:spPr>
+          <a:xfrm>
+            <a:off x="6675120" y="1371600"/>
+            <a:ext cx="0" cy="3566160"/>
+          </a:xfrm>
+          <a:prstGeom prst="line">
+            <a:avLst/>
+          </a:prstGeom>
+          <a:ln w="19050">
+            <a:solidFill>
+              <a:srgbClr val="B4C7D2"/>
+            </a:solidFill>
+          </a:ln>
+          <a:effectLst/>
+        </p:spPr>
+      </p:cxnSp>
+      <p:cxnSp>
+        <p:nvCxnSpPr>
+          <p:cNvPr id="41" name="C1-E10 line 39" descr="sci-ppt:o039"/>
+          <p:cNvCxnSpPr/>
+          <p:nvPr/>
+        </p:nvCxnSpPr>
+        <p:spPr>
+          <a:xfrm>
+            <a:off x="6675120" y="4937760"/>
+            <a:ext cx="0" cy="64008"/>
+          </a:xfrm>
+          <a:prstGeom prst="line">
+            <a:avLst/>
+          </a:prstGeom>
+          <a:ln w="12700">
+            <a:solidFill>
+              <a:srgbClr val="B4C7D2"/>
+            </a:solidFill>
+          </a:ln>
+          <a:effectLst/>
+        </p:spPr>
+      </p:cxnSp>
+      <p:cxnSp>
+        <p:nvCxnSpPr>
+          <p:cNvPr id="42" name="C1-E10 line 40" descr="sci-ppt:o040"/>
+          <p:cNvCxnSpPr/>
+          <p:nvPr/>
+        </p:nvCxnSpPr>
+        <p:spPr>
+          <a:xfrm>
+            <a:off x="6675120" y="1371600"/>
+            <a:ext cx="0" cy="3566160"/>
+          </a:xfrm>
+          <a:prstGeom prst="line">
+            <a:avLst/>
+          </a:prstGeom>
+          <a:ln w="7620">
+            <a:solidFill>
+              <a:srgbClr val="2E4756"/>
+            </a:solidFill>
+          </a:ln>
+          <a:effectLst/>
+        </p:spPr>
+      </p:cxnSp>
+      <p:sp>
+        <p:nvSpPr>
+          <p:cNvPr id="43" name="C1-E10 text 41" descr="sci-ppt:o041"/>
           <p:cNvSpPr txBox="1"/>
           <p:nvPr/>
         </p:nvSpPr>
         <p:spPr>
           <a:xfrm>
-            <a:off x="8534400" y="2133600"/>
-            <a:ext cx="2743200" cy="340156"/>
+            <a:off x="6217920" y="5020056"/>
+            <a:ext cx="914400" cy="208407"/>
           </a:xfrm>
           <a:prstGeom prst="rect">
             <a:avLst/>
@@ -3330,7 +5164,697 @@
           <a:effectLst/>
         </p:spPr>
         <p:txBody>
-          <a:bodyPr wrap="none" lIns="27432" rIns="27432" tIns="18288" bIns="18288" anchor="ctr">
+          <a:bodyPr wrap="none" lIns="18288" rIns="18288" tIns="18288" bIns="18288" anchor="t">
+            <a:spAutoFit/>
+          </a:bodyPr>
+          <a:lstStyle/>
+          <a:p>
+            <a:pPr algn="ctr">
+              <a:spcAft>
+                <a:spcPts val="0"/>
+              </a:spcAft>
+            </a:pPr>
+            <a:r>
+              <a:rPr sz="1050" b="0" i="0">
+                <a:solidFill>
+                  <a:srgbClr val="B4C7D2"/>
+                </a:solidFill>
+                <a:latin typeface="Arial"/>
+              </a:rPr>
+              <a:t>0.0</a:t>
+            </a:r>
+          </a:p>
+        </p:txBody>
+      </p:sp>
+      <p:cxnSp>
+        <p:nvCxnSpPr>
+          <p:cNvPr id="44" name="C1-E10 line 42" descr="sci-ppt:o042"/>
+          <p:cNvCxnSpPr/>
+          <p:nvPr/>
+        </p:nvCxnSpPr>
+        <p:spPr>
+          <a:xfrm>
+            <a:off x="8381999" y="4937760"/>
+            <a:ext cx="0" cy="64008"/>
+          </a:xfrm>
+          <a:prstGeom prst="line">
+            <a:avLst/>
+          </a:prstGeom>
+          <a:ln w="12700">
+            <a:solidFill>
+              <a:srgbClr val="B4C7D2"/>
+            </a:solidFill>
+          </a:ln>
+          <a:effectLst/>
+        </p:spPr>
+      </p:cxnSp>
+      <p:cxnSp>
+        <p:nvCxnSpPr>
+          <p:cNvPr id="45" name="C1-E10 line 43" descr="sci-ppt:o043"/>
+          <p:cNvCxnSpPr/>
+          <p:nvPr/>
+        </p:nvCxnSpPr>
+        <p:spPr>
+          <a:xfrm>
+            <a:off x="8381999" y="1371600"/>
+            <a:ext cx="0" cy="3566160"/>
+          </a:xfrm>
+          <a:prstGeom prst="line">
+            <a:avLst/>
+          </a:prstGeom>
+          <a:ln w="7620">
+            <a:solidFill>
+              <a:srgbClr val="2E4756"/>
+            </a:solidFill>
+          </a:ln>
+          <a:effectLst/>
+        </p:spPr>
+      </p:cxnSp>
+      <p:sp>
+        <p:nvSpPr>
+          <p:cNvPr id="46" name="C1-E10 text 44" descr="sci-ppt:o044"/>
+          <p:cNvSpPr txBox="1"/>
+          <p:nvPr/>
+        </p:nvSpPr>
+        <p:spPr>
+          <a:xfrm>
+            <a:off x="7924799" y="5020056"/>
+            <a:ext cx="914400" cy="208407"/>
+          </a:xfrm>
+          <a:prstGeom prst="rect">
+            <a:avLst/>
+          </a:prstGeom>
+          <a:noFill/>
+          <a:effectLst/>
+        </p:spPr>
+        <p:txBody>
+          <a:bodyPr wrap="none" lIns="18288" rIns="18288" tIns="18288" bIns="18288" anchor="t">
+            <a:spAutoFit/>
+          </a:bodyPr>
+          <a:lstStyle/>
+          <a:p>
+            <a:pPr algn="ctr">
+              <a:spcAft>
+                <a:spcPts val="0"/>
+              </a:spcAft>
+            </a:pPr>
+            <a:r>
+              <a:rPr sz="1050" b="0" i="0">
+                <a:solidFill>
+                  <a:srgbClr val="B4C7D2"/>
+                </a:solidFill>
+                <a:latin typeface="Arial"/>
+              </a:rPr>
+              <a:t>0.5</a:t>
+            </a:r>
+          </a:p>
+        </p:txBody>
+      </p:sp>
+      <p:cxnSp>
+        <p:nvCxnSpPr>
+          <p:cNvPr id="47" name="C1-E10 line 45" descr="sci-ppt:o045"/>
+          <p:cNvCxnSpPr/>
+          <p:nvPr/>
+        </p:nvCxnSpPr>
+        <p:spPr>
+          <a:xfrm>
+            <a:off x="10088880" y="4937760"/>
+            <a:ext cx="0" cy="64008"/>
+          </a:xfrm>
+          <a:prstGeom prst="line">
+            <a:avLst/>
+          </a:prstGeom>
+          <a:ln w="12700">
+            <a:solidFill>
+              <a:srgbClr val="B4C7D2"/>
+            </a:solidFill>
+          </a:ln>
+          <a:effectLst/>
+        </p:spPr>
+      </p:cxnSp>
+      <p:cxnSp>
+        <p:nvCxnSpPr>
+          <p:cNvPr id="48" name="C1-E10 line 46" descr="sci-ppt:o046"/>
+          <p:cNvCxnSpPr/>
+          <p:nvPr/>
+        </p:nvCxnSpPr>
+        <p:spPr>
+          <a:xfrm>
+            <a:off x="10088880" y="1371600"/>
+            <a:ext cx="0" cy="3566160"/>
+          </a:xfrm>
+          <a:prstGeom prst="line">
+            <a:avLst/>
+          </a:prstGeom>
+          <a:ln w="7620">
+            <a:solidFill>
+              <a:srgbClr val="2E4756"/>
+            </a:solidFill>
+          </a:ln>
+          <a:effectLst/>
+        </p:spPr>
+      </p:cxnSp>
+      <p:sp>
+        <p:nvSpPr>
+          <p:cNvPr id="49" name="C1-E10 text 47" descr="sci-ppt:o047"/>
+          <p:cNvSpPr txBox="1"/>
+          <p:nvPr/>
+        </p:nvSpPr>
+        <p:spPr>
+          <a:xfrm>
+            <a:off x="9631680" y="5020056"/>
+            <a:ext cx="914400" cy="208407"/>
+          </a:xfrm>
+          <a:prstGeom prst="rect">
+            <a:avLst/>
+          </a:prstGeom>
+          <a:noFill/>
+          <a:effectLst/>
+        </p:spPr>
+        <p:txBody>
+          <a:bodyPr wrap="none" lIns="18288" rIns="18288" tIns="18288" bIns="18288" anchor="t">
+            <a:spAutoFit/>
+          </a:bodyPr>
+          <a:lstStyle/>
+          <a:p>
+            <a:pPr algn="ctr">
+              <a:spcAft>
+                <a:spcPts val="0"/>
+              </a:spcAft>
+            </a:pPr>
+            <a:r>
+              <a:rPr sz="1050" b="0" i="0">
+                <a:solidFill>
+                  <a:srgbClr val="B4C7D2"/>
+                </a:solidFill>
+                <a:latin typeface="Arial"/>
+              </a:rPr>
+              <a:t>1.0</a:t>
+            </a:r>
+          </a:p>
+        </p:txBody>
+      </p:sp>
+      <p:cxnSp>
+        <p:nvCxnSpPr>
+          <p:cNvPr id="50" name="C1-E10 line 48" descr="sci-ppt:o048"/>
+          <p:cNvCxnSpPr/>
+          <p:nvPr/>
+        </p:nvCxnSpPr>
+        <p:spPr>
+          <a:xfrm>
+            <a:off x="11795759" y="4937760"/>
+            <a:ext cx="0" cy="64008"/>
+          </a:xfrm>
+          <a:prstGeom prst="line">
+            <a:avLst/>
+          </a:prstGeom>
+          <a:ln w="12700">
+            <a:solidFill>
+              <a:srgbClr val="B4C7D2"/>
+            </a:solidFill>
+          </a:ln>
+          <a:effectLst/>
+        </p:spPr>
+      </p:cxnSp>
+      <p:cxnSp>
+        <p:nvCxnSpPr>
+          <p:cNvPr id="51" name="C1-E10 line 49" descr="sci-ppt:o049"/>
+          <p:cNvCxnSpPr/>
+          <p:nvPr/>
+        </p:nvCxnSpPr>
+        <p:spPr>
+          <a:xfrm>
+            <a:off x="11795759" y="1371600"/>
+            <a:ext cx="0" cy="3566160"/>
+          </a:xfrm>
+          <a:prstGeom prst="line">
+            <a:avLst/>
+          </a:prstGeom>
+          <a:ln w="7620">
+            <a:solidFill>
+              <a:srgbClr val="2E4756"/>
+            </a:solidFill>
+          </a:ln>
+          <a:effectLst/>
+        </p:spPr>
+      </p:cxnSp>
+      <p:sp>
+        <p:nvSpPr>
+          <p:cNvPr id="52" name="C1-E10 text 50" descr="sci-ppt:o050"/>
+          <p:cNvSpPr txBox="1"/>
+          <p:nvPr/>
+        </p:nvSpPr>
+        <p:spPr>
+          <a:xfrm>
+            <a:off x="11338559" y="5020056"/>
+            <a:ext cx="914400" cy="208407"/>
+          </a:xfrm>
+          <a:prstGeom prst="rect">
+            <a:avLst/>
+          </a:prstGeom>
+          <a:noFill/>
+          <a:effectLst/>
+        </p:spPr>
+        <p:txBody>
+          <a:bodyPr wrap="none" lIns="18288" rIns="18288" tIns="18288" bIns="18288" anchor="t">
+            <a:spAutoFit/>
+          </a:bodyPr>
+          <a:lstStyle/>
+          <a:p>
+            <a:pPr algn="ctr">
+              <a:spcAft>
+                <a:spcPts val="0"/>
+              </a:spcAft>
+            </a:pPr>
+            <a:r>
+              <a:rPr sz="1050" b="0" i="0">
+                <a:solidFill>
+                  <a:srgbClr val="B4C7D2"/>
+                </a:solidFill>
+                <a:latin typeface="Arial"/>
+              </a:rPr>
+              <a:t>1.5</a:t>
+            </a:r>
+          </a:p>
+        </p:txBody>
+      </p:sp>
+      <p:cxnSp>
+        <p:nvCxnSpPr>
+          <p:cNvPr id="53" name="C1-E10 line 51" descr="sci-ppt:o051"/>
+          <p:cNvCxnSpPr/>
+          <p:nvPr/>
+        </p:nvCxnSpPr>
+        <p:spPr>
+          <a:xfrm>
+            <a:off x="6611112" y="4937760"/>
+            <a:ext cx="64008" cy="0"/>
+          </a:xfrm>
+          <a:prstGeom prst="line">
+            <a:avLst/>
+          </a:prstGeom>
+          <a:ln w="12700">
+            <a:solidFill>
+              <a:srgbClr val="B4C7D2"/>
+            </a:solidFill>
+          </a:ln>
+          <a:effectLst/>
+        </p:spPr>
+      </p:cxnSp>
+      <p:cxnSp>
+        <p:nvCxnSpPr>
+          <p:cNvPr id="54" name="C1-E10 line 52" descr="sci-ppt:o052"/>
+          <p:cNvCxnSpPr/>
+          <p:nvPr/>
+        </p:nvCxnSpPr>
+        <p:spPr>
+          <a:xfrm>
+            <a:off x="6611112" y="4046220"/>
+            <a:ext cx="64008" cy="0"/>
+          </a:xfrm>
+          <a:prstGeom prst="line">
+            <a:avLst/>
+          </a:prstGeom>
+          <a:ln w="12700">
+            <a:solidFill>
+              <a:srgbClr val="B4C7D2"/>
+            </a:solidFill>
+          </a:ln>
+          <a:effectLst/>
+        </p:spPr>
+      </p:cxnSp>
+      <p:cxnSp>
+        <p:nvCxnSpPr>
+          <p:cNvPr id="55" name="C1-E10 line 53" descr="sci-ppt:o053"/>
+          <p:cNvCxnSpPr/>
+          <p:nvPr/>
+        </p:nvCxnSpPr>
+        <p:spPr>
+          <a:xfrm>
+            <a:off x="6675120" y="4046220"/>
+            <a:ext cx="5120639" cy="0"/>
+          </a:xfrm>
+          <a:prstGeom prst="line">
+            <a:avLst/>
+          </a:prstGeom>
+          <a:ln w="7620">
+            <a:solidFill>
+              <a:srgbClr val="2E4756"/>
+            </a:solidFill>
+          </a:ln>
+          <a:effectLst/>
+        </p:spPr>
+      </p:cxnSp>
+      <p:sp>
+        <p:nvSpPr>
+          <p:cNvPr id="56" name="C1-E10 text 54" descr="sci-ppt:o054"/>
+          <p:cNvSpPr txBox="1"/>
+          <p:nvPr/>
+        </p:nvSpPr>
+        <p:spPr>
+          <a:xfrm>
+            <a:off x="5806440" y="3963924"/>
+            <a:ext cx="777240" cy="208407"/>
+          </a:xfrm>
+          <a:prstGeom prst="rect">
+            <a:avLst/>
+          </a:prstGeom>
+          <a:noFill/>
+          <a:effectLst/>
+        </p:spPr>
+        <p:txBody>
+          <a:bodyPr wrap="none" lIns="18288" rIns="18288" tIns="18288" bIns="18288" anchor="t">
+            <a:spAutoFit/>
+          </a:bodyPr>
+          <a:lstStyle/>
+          <a:p>
+            <a:pPr algn="r">
+              <a:spcAft>
+                <a:spcPts val="0"/>
+              </a:spcAft>
+            </a:pPr>
+            <a:r>
+              <a:rPr sz="1050" b="0" i="0">
+                <a:solidFill>
+                  <a:srgbClr val="B4C7D2"/>
+                </a:solidFill>
+                <a:latin typeface="Arial"/>
+              </a:rPr>
+              <a:t>-1.50</a:t>
+            </a:r>
+          </a:p>
+        </p:txBody>
+      </p:sp>
+      <p:cxnSp>
+        <p:nvCxnSpPr>
+          <p:cNvPr id="57" name="C1-E10 line 55" descr="sci-ppt:o055"/>
+          <p:cNvCxnSpPr/>
+          <p:nvPr/>
+        </p:nvCxnSpPr>
+        <p:spPr>
+          <a:xfrm>
+            <a:off x="6611112" y="3154680"/>
+            <a:ext cx="64008" cy="0"/>
+          </a:xfrm>
+          <a:prstGeom prst="line">
+            <a:avLst/>
+          </a:prstGeom>
+          <a:ln w="12700">
+            <a:solidFill>
+              <a:srgbClr val="B4C7D2"/>
+            </a:solidFill>
+          </a:ln>
+          <a:effectLst/>
+        </p:spPr>
+      </p:cxnSp>
+      <p:cxnSp>
+        <p:nvCxnSpPr>
+          <p:cNvPr id="58" name="C1-E10 line 56" descr="sci-ppt:o056"/>
+          <p:cNvCxnSpPr/>
+          <p:nvPr/>
+        </p:nvCxnSpPr>
+        <p:spPr>
+          <a:xfrm>
+            <a:off x="6675120" y="3154680"/>
+            <a:ext cx="5120639" cy="0"/>
+          </a:xfrm>
+          <a:prstGeom prst="line">
+            <a:avLst/>
+          </a:prstGeom>
+          <a:ln w="7620">
+            <a:solidFill>
+              <a:srgbClr val="2E4756"/>
+            </a:solidFill>
+          </a:ln>
+          <a:effectLst/>
+        </p:spPr>
+      </p:cxnSp>
+      <p:sp>
+        <p:nvSpPr>
+          <p:cNvPr id="59" name="C1-E10 text 57" descr="sci-ppt:o057"/>
+          <p:cNvSpPr txBox="1"/>
+          <p:nvPr/>
+        </p:nvSpPr>
+        <p:spPr>
+          <a:xfrm>
+            <a:off x="5806440" y="3072384"/>
+            <a:ext cx="777240" cy="208407"/>
+          </a:xfrm>
+          <a:prstGeom prst="rect">
+            <a:avLst/>
+          </a:prstGeom>
+          <a:noFill/>
+          <a:effectLst/>
+        </p:spPr>
+        <p:txBody>
+          <a:bodyPr wrap="none" lIns="18288" rIns="18288" tIns="18288" bIns="18288" anchor="t">
+            <a:spAutoFit/>
+          </a:bodyPr>
+          <a:lstStyle/>
+          <a:p>
+            <a:pPr algn="r">
+              <a:spcAft>
+                <a:spcPts val="0"/>
+              </a:spcAft>
+            </a:pPr>
+            <a:r>
+              <a:rPr sz="1050" b="0" i="0">
+                <a:solidFill>
+                  <a:srgbClr val="B4C7D2"/>
+                </a:solidFill>
+                <a:latin typeface="Arial"/>
+              </a:rPr>
+              <a:t>0.00</a:t>
+            </a:r>
+          </a:p>
+        </p:txBody>
+      </p:sp>
+      <p:cxnSp>
+        <p:nvCxnSpPr>
+          <p:cNvPr id="60" name="C1-E10 line 58" descr="sci-ppt:o058"/>
+          <p:cNvCxnSpPr/>
+          <p:nvPr/>
+        </p:nvCxnSpPr>
+        <p:spPr>
+          <a:xfrm>
+            <a:off x="6611112" y="2263140"/>
+            <a:ext cx="64008" cy="0"/>
+          </a:xfrm>
+          <a:prstGeom prst="line">
+            <a:avLst/>
+          </a:prstGeom>
+          <a:ln w="12700">
+            <a:solidFill>
+              <a:srgbClr val="B4C7D2"/>
+            </a:solidFill>
+          </a:ln>
+          <a:effectLst/>
+        </p:spPr>
+      </p:cxnSp>
+      <p:cxnSp>
+        <p:nvCxnSpPr>
+          <p:cNvPr id="61" name="C1-E10 line 59" descr="sci-ppt:o059"/>
+          <p:cNvCxnSpPr/>
+          <p:nvPr/>
+        </p:nvCxnSpPr>
+        <p:spPr>
+          <a:xfrm>
+            <a:off x="6675120" y="2263140"/>
+            <a:ext cx="5120639" cy="0"/>
+          </a:xfrm>
+          <a:prstGeom prst="line">
+            <a:avLst/>
+          </a:prstGeom>
+          <a:ln w="7620">
+            <a:solidFill>
+              <a:srgbClr val="2E4756"/>
+            </a:solidFill>
+          </a:ln>
+          <a:effectLst/>
+        </p:spPr>
+      </p:cxnSp>
+      <p:sp>
+        <p:nvSpPr>
+          <p:cNvPr id="62" name="C1-E10 text 60" descr="sci-ppt:o060"/>
+          <p:cNvSpPr txBox="1"/>
+          <p:nvPr/>
+        </p:nvSpPr>
+        <p:spPr>
+          <a:xfrm>
+            <a:off x="5806440" y="2180844"/>
+            <a:ext cx="777240" cy="208407"/>
+          </a:xfrm>
+          <a:prstGeom prst="rect">
+            <a:avLst/>
+          </a:prstGeom>
+          <a:noFill/>
+          <a:effectLst/>
+        </p:spPr>
+        <p:txBody>
+          <a:bodyPr wrap="none" lIns="18288" rIns="18288" tIns="18288" bIns="18288" anchor="t">
+            <a:spAutoFit/>
+          </a:bodyPr>
+          <a:lstStyle/>
+          <a:p>
+            <a:pPr algn="r">
+              <a:spcAft>
+                <a:spcPts val="0"/>
+              </a:spcAft>
+            </a:pPr>
+            <a:r>
+              <a:rPr sz="1050" b="0" i="0">
+                <a:solidFill>
+                  <a:srgbClr val="B4C7D2"/>
+                </a:solidFill>
+                <a:latin typeface="Arial"/>
+              </a:rPr>
+              <a:t>1.50</a:t>
+            </a:r>
+          </a:p>
+        </p:txBody>
+      </p:sp>
+      <p:cxnSp>
+        <p:nvCxnSpPr>
+          <p:cNvPr id="63" name="C1-E10 line 61" descr="sci-ppt:o061"/>
+          <p:cNvCxnSpPr/>
+          <p:nvPr/>
+        </p:nvCxnSpPr>
+        <p:spPr>
+          <a:xfrm>
+            <a:off x="6611112" y="1371600"/>
+            <a:ext cx="64008" cy="0"/>
+          </a:xfrm>
+          <a:prstGeom prst="line">
+            <a:avLst/>
+          </a:prstGeom>
+          <a:ln w="12700">
+            <a:solidFill>
+              <a:srgbClr val="B4C7D2"/>
+            </a:solidFill>
+          </a:ln>
+          <a:effectLst/>
+        </p:spPr>
+      </p:cxnSp>
+      <p:cxnSp>
+        <p:nvCxnSpPr>
+          <p:cNvPr id="64" name="C1-E10 line 62" descr="sci-ppt:o062"/>
+          <p:cNvCxnSpPr/>
+          <p:nvPr/>
+        </p:nvCxnSpPr>
+        <p:spPr>
+          <a:xfrm>
+            <a:off x="6675120" y="1371600"/>
+            <a:ext cx="5120639" cy="0"/>
+          </a:xfrm>
+          <a:prstGeom prst="line">
+            <a:avLst/>
+          </a:prstGeom>
+          <a:ln w="7620">
+            <a:solidFill>
+              <a:srgbClr val="2E4756"/>
+            </a:solidFill>
+          </a:ln>
+          <a:effectLst/>
+        </p:spPr>
+      </p:cxnSp>
+      <p:sp>
+        <p:nvSpPr>
+          <p:cNvPr id="65" name="C1-E10 text 63" descr="sci-ppt:o063"/>
+          <p:cNvSpPr txBox="1"/>
+          <p:nvPr/>
+        </p:nvSpPr>
+        <p:spPr>
+          <a:xfrm>
+            <a:off x="5806440" y="1289304"/>
+            <a:ext cx="777240" cy="208407"/>
+          </a:xfrm>
+          <a:prstGeom prst="rect">
+            <a:avLst/>
+          </a:prstGeom>
+          <a:noFill/>
+          <a:effectLst/>
+        </p:spPr>
+        <p:txBody>
+          <a:bodyPr wrap="none" lIns="18288" rIns="18288" tIns="18288" bIns="18288" anchor="t">
+            <a:spAutoFit/>
+          </a:bodyPr>
+          <a:lstStyle/>
+          <a:p>
+            <a:pPr algn="r">
+              <a:spcAft>
+                <a:spcPts val="0"/>
+              </a:spcAft>
+            </a:pPr>
+            <a:r>
+              <a:rPr sz="1050" b="0" i="0">
+                <a:solidFill>
+                  <a:srgbClr val="B4C7D2"/>
+                </a:solidFill>
+                <a:latin typeface="Arial"/>
+              </a:rPr>
+              <a:t>3.00</a:t>
+            </a:r>
+          </a:p>
+        </p:txBody>
+      </p:sp>
+      <p:sp>
+        <p:nvSpPr>
+          <p:cNvPr id="66" name="C1-E10 text 64" descr="sci-ppt:o064"/>
+          <p:cNvSpPr txBox="1"/>
+          <p:nvPr/>
+        </p:nvSpPr>
+        <p:spPr>
+          <a:xfrm>
+            <a:off x="6675120" y="5221224"/>
+            <a:ext cx="5120640" cy="231648"/>
+          </a:xfrm>
+          <a:prstGeom prst="rect">
+            <a:avLst/>
+          </a:prstGeom>
+          <a:noFill/>
+          <a:effectLst/>
+        </p:spPr>
+        <p:txBody>
+          <a:bodyPr wrap="none" lIns="18288" rIns="18288" tIns="18288" bIns="18288" anchor="t">
+            <a:spAutoFit/>
+          </a:bodyPr>
+          <a:lstStyle/>
+          <a:p>
+            <a:pPr algn="ctr">
+              <a:spcAft>
+                <a:spcPts val="0"/>
+              </a:spcAft>
+            </a:pPr>
+            <a:r>
+              <a:rPr sz="1200" b="0" i="0">
+                <a:solidFill>
+                  <a:srgbClr val="E7F0F3"/>
+                </a:solidFill>
+                <a:latin typeface="Arial"/>
+              </a:rPr>
+              <a:t>t  (µs)</a:t>
+            </a:r>
+          </a:p>
+        </p:txBody>
+      </p:sp>
+      <p:sp>
+        <p:nvSpPr>
+          <p:cNvPr id="67" name="C1-E10 text 65" descr="sci-ppt:o065"/>
+          <p:cNvSpPr txBox="1"/>
+          <p:nvPr/>
+        </p:nvSpPr>
+        <p:spPr>
+          <a:xfrm>
+            <a:off x="6126480" y="1024128"/>
+            <a:ext cx="5120640" cy="231648"/>
+          </a:xfrm>
+          <a:prstGeom prst="rect">
+            <a:avLst/>
+          </a:prstGeom>
+          <a:noFill/>
+          <a:effectLst/>
+        </p:spPr>
+        <p:txBody>
+          <a:bodyPr wrap="none" lIns="18288" rIns="18288" tIns="18288" bIns="18288" anchor="t">
             <a:spAutoFit/>
           </a:bodyPr>
           <a:lstStyle/>
@@ -3341,75 +5865,1931 @@
               </a:spcAft>
             </a:pPr>
             <a:r>
-              <a:rPr sz="1728" b="0" i="0">
+              <a:rPr sz="1200" b="0" i="0">
                 <a:solidFill>
                   <a:srgbClr val="E7F0F3"/>
                 </a:solidFill>
                 <a:latin typeface="Arial"/>
               </a:rPr>
-              <a:t>Viscous dissipation</a:t>
+              <a:t>power (mW)</a:t>
             </a:r>
           </a:p>
         </p:txBody>
       </p:sp>
       <p:cxnSp>
         <p:nvCxnSpPr>
-          <p:cNvPr id="9" name="arrow8" descr="sci-ppt:C1-E10-008"/>
+          <p:cNvPr id="68" name="C1-E10 line 66" descr="sci-ppt:o066"/>
           <p:cNvCxnSpPr/>
           <p:nvPr/>
         </p:nvCxnSpPr>
         <p:spPr>
           <a:xfrm>
-            <a:off x="3718560" y="2621280"/>
-            <a:ext cx="670560" cy="0"/>
+            <a:off x="6675120" y="3154680"/>
+            <a:ext cx="5120639" cy="0"/>
           </a:xfrm>
           <a:prstGeom prst="line">
             <a:avLst/>
           </a:prstGeom>
-          <a:ln w="25400">
+          <a:ln w="15240">
+            <a:solidFill>
+              <a:srgbClr val="2E4756"/>
+            </a:solidFill>
+          </a:ln>
+          <a:effectLst/>
+        </p:spPr>
+      </p:cxnSp>
+      <p:sp>
+        <p:nvSpPr>
+          <p:cNvPr id="69" name="C1-E10 polygon 67" descr="sci-ppt:o067"/>
+          <p:cNvSpPr/>
+          <p:nvPr/>
+        </p:nvSpPr>
+        <p:spPr>
+          <a:xfrm>
+            <a:off x="6675120" y="1870805"/>
+            <a:ext cx="5120639" cy="1626618"/>
+          </a:xfrm>
+          <a:custGeom>
+            <a:avLst/>
+            <a:gdLst/>
+            <a:ahLst/>
+            <a:cxnLst/>
+            <a:rect l="l" t="t" r="r" b="b"/>
+            <a:pathLst>
+              <a:path w="5120639" h="1626618">
+                <a:moveTo>
+                  <a:pt x="0" y="1278575"/>
+                </a:moveTo>
+                <a:lnTo>
+                  <a:pt x="35853" y="991066"/>
+                </a:lnTo>
+                <a:lnTo>
+                  <a:pt x="71706" y="718379"/>
+                </a:lnTo>
+                <a:lnTo>
+                  <a:pt x="107560" y="481257"/>
+                </a:lnTo>
+                <a:lnTo>
+                  <a:pt x="143413" y="289912"/>
+                </a:lnTo>
+                <a:lnTo>
+                  <a:pt x="179267" y="148699"/>
+                </a:lnTo>
+                <a:lnTo>
+                  <a:pt x="215120" y="56765"/>
+                </a:lnTo>
+                <a:lnTo>
+                  <a:pt x="250974" y="9468"/>
+                </a:lnTo>
+                <a:lnTo>
+                  <a:pt x="286827" y="0"/>
+                </a:lnTo>
+                <a:lnTo>
+                  <a:pt x="322680" y="20783"/>
+                </a:lnTo>
+                <a:lnTo>
+                  <a:pt x="358534" y="64470"/>
+                </a:lnTo>
+                <a:lnTo>
+                  <a:pt x="394387" y="124529"/>
+                </a:lnTo>
+                <a:lnTo>
+                  <a:pt x="430241" y="195498"/>
+                </a:lnTo>
+                <a:lnTo>
+                  <a:pt x="466094" y="273018"/>
+                </a:lnTo>
+                <a:lnTo>
+                  <a:pt x="501948" y="353745"/>
+                </a:lnTo>
+                <a:lnTo>
+                  <a:pt x="537801" y="435195"/>
+                </a:lnTo>
+                <a:lnTo>
+                  <a:pt x="573655" y="515589"/>
+                </a:lnTo>
+                <a:lnTo>
+                  <a:pt x="609508" y="593696"/>
+                </a:lnTo>
+                <a:lnTo>
+                  <a:pt x="645361" y="668705"/>
+                </a:lnTo>
+                <a:lnTo>
+                  <a:pt x="681215" y="740122"/>
+                </a:lnTo>
+                <a:lnTo>
+                  <a:pt x="717068" y="807675"/>
+                </a:lnTo>
+                <a:lnTo>
+                  <a:pt x="752922" y="871262"/>
+                </a:lnTo>
+                <a:lnTo>
+                  <a:pt x="788775" y="930891"/>
+                </a:lnTo>
+                <a:lnTo>
+                  <a:pt x="824629" y="986648"/>
+                </a:lnTo>
+                <a:lnTo>
+                  <a:pt x="860482" y="1038671"/>
+                </a:lnTo>
+                <a:lnTo>
+                  <a:pt x="896336" y="1087127"/>
+                </a:lnTo>
+                <a:lnTo>
+                  <a:pt x="932189" y="1132203"/>
+                </a:lnTo>
+                <a:lnTo>
+                  <a:pt x="968042" y="1174091"/>
+                </a:lnTo>
+                <a:lnTo>
+                  <a:pt x="1003896" y="1212984"/>
+                </a:lnTo>
+                <a:lnTo>
+                  <a:pt x="1039749" y="1249071"/>
+                </a:lnTo>
+                <a:lnTo>
+                  <a:pt x="1075603" y="1282536"/>
+                </a:lnTo>
+                <a:lnTo>
+                  <a:pt x="1111456" y="1313552"/>
+                </a:lnTo>
+                <a:lnTo>
+                  <a:pt x="1147310" y="1342283"/>
+                </a:lnTo>
+                <a:lnTo>
+                  <a:pt x="1183163" y="1368883"/>
+                </a:lnTo>
+                <a:lnTo>
+                  <a:pt x="1219017" y="1393496"/>
+                </a:lnTo>
+                <a:lnTo>
+                  <a:pt x="1254870" y="1416255"/>
+                </a:lnTo>
+                <a:lnTo>
+                  <a:pt x="1290723" y="1437285"/>
+                </a:lnTo>
+                <a:lnTo>
+                  <a:pt x="1326577" y="1456700"/>
+                </a:lnTo>
+                <a:lnTo>
+                  <a:pt x="1362430" y="1474607"/>
+                </a:lnTo>
+                <a:lnTo>
+                  <a:pt x="1398284" y="1491104"/>
+                </a:lnTo>
+                <a:lnTo>
+                  <a:pt x="1434137" y="1506282"/>
+                </a:lnTo>
+                <a:lnTo>
+                  <a:pt x="1469991" y="1520226"/>
+                </a:lnTo>
+                <a:lnTo>
+                  <a:pt x="1505844" y="1533012"/>
+                </a:lnTo>
+                <a:lnTo>
+                  <a:pt x="1541698" y="1544713"/>
+                </a:lnTo>
+                <a:lnTo>
+                  <a:pt x="1577551" y="1555394"/>
+                </a:lnTo>
+                <a:lnTo>
+                  <a:pt x="1613404" y="1565118"/>
+                </a:lnTo>
+                <a:lnTo>
+                  <a:pt x="1649258" y="1573941"/>
+                </a:lnTo>
+                <a:lnTo>
+                  <a:pt x="1685111" y="1581916"/>
+                </a:lnTo>
+                <a:lnTo>
+                  <a:pt x="1720965" y="1589091"/>
+                </a:lnTo>
+                <a:lnTo>
+                  <a:pt x="1756818" y="1595513"/>
+                </a:lnTo>
+                <a:lnTo>
+                  <a:pt x="1792672" y="1601223"/>
+                </a:lnTo>
+                <a:lnTo>
+                  <a:pt x="1828525" y="1606260"/>
+                </a:lnTo>
+                <a:lnTo>
+                  <a:pt x="1864379" y="1610661"/>
+                </a:lnTo>
+                <a:lnTo>
+                  <a:pt x="1900232" y="1614461"/>
+                </a:lnTo>
+                <a:lnTo>
+                  <a:pt x="1936085" y="1617689"/>
+                </a:lnTo>
+                <a:lnTo>
+                  <a:pt x="1971939" y="1620378"/>
+                </a:lnTo>
+                <a:lnTo>
+                  <a:pt x="2007792" y="1622553"/>
+                </a:lnTo>
+                <a:lnTo>
+                  <a:pt x="2043646" y="1624241"/>
+                </a:lnTo>
+                <a:lnTo>
+                  <a:pt x="2079499" y="1625466"/>
+                </a:lnTo>
+                <a:lnTo>
+                  <a:pt x="2115353" y="1626251"/>
+                </a:lnTo>
+                <a:lnTo>
+                  <a:pt x="2151206" y="1626618"/>
+                </a:lnTo>
+                <a:lnTo>
+                  <a:pt x="2187060" y="1626586"/>
+                </a:lnTo>
+                <a:lnTo>
+                  <a:pt x="2222913" y="1626174"/>
+                </a:lnTo>
+                <a:lnTo>
+                  <a:pt x="2258766" y="1625400"/>
+                </a:lnTo>
+                <a:lnTo>
+                  <a:pt x="2294620" y="1624281"/>
+                </a:lnTo>
+                <a:lnTo>
+                  <a:pt x="2330473" y="1622832"/>
+                </a:lnTo>
+                <a:lnTo>
+                  <a:pt x="2366327" y="1621069"/>
+                </a:lnTo>
+                <a:lnTo>
+                  <a:pt x="2402180" y="1619005"/>
+                </a:lnTo>
+                <a:lnTo>
+                  <a:pt x="2438034" y="1616655"/>
+                </a:lnTo>
+                <a:lnTo>
+                  <a:pt x="2473887" y="1614030"/>
+                </a:lnTo>
+                <a:lnTo>
+                  <a:pt x="2509741" y="1611143"/>
+                </a:lnTo>
+                <a:lnTo>
+                  <a:pt x="2545594" y="1608004"/>
+                </a:lnTo>
+                <a:lnTo>
+                  <a:pt x="2581447" y="1604626"/>
+                </a:lnTo>
+                <a:lnTo>
+                  <a:pt x="2617301" y="1601018"/>
+                </a:lnTo>
+                <a:lnTo>
+                  <a:pt x="2653154" y="1597190"/>
+                </a:lnTo>
+                <a:lnTo>
+                  <a:pt x="2689008" y="1593151"/>
+                </a:lnTo>
+                <a:lnTo>
+                  <a:pt x="2724861" y="1588911"/>
+                </a:lnTo>
+                <a:lnTo>
+                  <a:pt x="2760715" y="1584477"/>
+                </a:lnTo>
+                <a:lnTo>
+                  <a:pt x="2796568" y="1579858"/>
+                </a:lnTo>
+                <a:lnTo>
+                  <a:pt x="2832422" y="1575062"/>
+                </a:lnTo>
+                <a:lnTo>
+                  <a:pt x="2868275" y="1570096"/>
+                </a:lnTo>
+                <a:lnTo>
+                  <a:pt x="2904128" y="1564968"/>
+                </a:lnTo>
+                <a:lnTo>
+                  <a:pt x="2939982" y="1559684"/>
+                </a:lnTo>
+                <a:lnTo>
+                  <a:pt x="2975835" y="1554250"/>
+                </a:lnTo>
+                <a:lnTo>
+                  <a:pt x="3011689" y="1548674"/>
+                </a:lnTo>
+                <a:lnTo>
+                  <a:pt x="3047542" y="1542961"/>
+                </a:lnTo>
+                <a:lnTo>
+                  <a:pt x="3083396" y="1537117"/>
+                </a:lnTo>
+                <a:lnTo>
+                  <a:pt x="3119249" y="1531148"/>
+                </a:lnTo>
+                <a:lnTo>
+                  <a:pt x="3155103" y="1525060"/>
+                </a:lnTo>
+                <a:lnTo>
+                  <a:pt x="3190956" y="1518857"/>
+                </a:lnTo>
+                <a:lnTo>
+                  <a:pt x="3226809" y="1512545"/>
+                </a:lnTo>
+                <a:lnTo>
+                  <a:pt x="3262663" y="1506128"/>
+                </a:lnTo>
+                <a:lnTo>
+                  <a:pt x="3298516" y="1499612"/>
+                </a:lnTo>
+                <a:lnTo>
+                  <a:pt x="3334370" y="1493002"/>
+                </a:lnTo>
+                <a:lnTo>
+                  <a:pt x="3370223" y="1486301"/>
+                </a:lnTo>
+                <a:lnTo>
+                  <a:pt x="3406077" y="1479514"/>
+                </a:lnTo>
+                <a:lnTo>
+                  <a:pt x="3441930" y="1472645"/>
+                </a:lnTo>
+                <a:lnTo>
+                  <a:pt x="3477784" y="1465699"/>
+                </a:lnTo>
+                <a:lnTo>
+                  <a:pt x="3513637" y="1458680"/>
+                </a:lnTo>
+                <a:lnTo>
+                  <a:pt x="3549490" y="1451591"/>
+                </a:lnTo>
+                <a:lnTo>
+                  <a:pt x="3585344" y="1444436"/>
+                </a:lnTo>
+                <a:lnTo>
+                  <a:pt x="3621197" y="1437220"/>
+                </a:lnTo>
+                <a:lnTo>
+                  <a:pt x="3657051" y="1429946"/>
+                </a:lnTo>
+                <a:lnTo>
+                  <a:pt x="3692904" y="1422617"/>
+                </a:lnTo>
+                <a:lnTo>
+                  <a:pt x="3728758" y="1415238"/>
+                </a:lnTo>
+                <a:lnTo>
+                  <a:pt x="3764611" y="1407811"/>
+                </a:lnTo>
+                <a:lnTo>
+                  <a:pt x="3800464" y="1400340"/>
+                </a:lnTo>
+                <a:lnTo>
+                  <a:pt x="3836318" y="1392829"/>
+                </a:lnTo>
+                <a:lnTo>
+                  <a:pt x="3872171" y="1385280"/>
+                </a:lnTo>
+                <a:lnTo>
+                  <a:pt x="3908025" y="1377698"/>
+                </a:lnTo>
+                <a:lnTo>
+                  <a:pt x="3943878" y="1370085"/>
+                </a:lnTo>
+                <a:lnTo>
+                  <a:pt x="3979732" y="1362444"/>
+                </a:lnTo>
+                <a:lnTo>
+                  <a:pt x="4015585" y="1354779"/>
+                </a:lnTo>
+                <a:lnTo>
+                  <a:pt x="4051439" y="1347092"/>
+                </a:lnTo>
+                <a:lnTo>
+                  <a:pt x="4087292" y="1339388"/>
+                </a:lnTo>
+                <a:lnTo>
+                  <a:pt x="4123145" y="1331668"/>
+                </a:lnTo>
+                <a:lnTo>
+                  <a:pt x="4158999" y="1323937"/>
+                </a:lnTo>
+                <a:lnTo>
+                  <a:pt x="4194852" y="1316196"/>
+                </a:lnTo>
+                <a:lnTo>
+                  <a:pt x="4230706" y="1308450"/>
+                </a:lnTo>
+                <a:lnTo>
+                  <a:pt x="4266559" y="1300700"/>
+                </a:lnTo>
+                <a:lnTo>
+                  <a:pt x="4302413" y="1292951"/>
+                </a:lnTo>
+                <a:lnTo>
+                  <a:pt x="4338266" y="1285205"/>
+                </a:lnTo>
+                <a:lnTo>
+                  <a:pt x="4374120" y="1277464"/>
+                </a:lnTo>
+                <a:lnTo>
+                  <a:pt x="4409973" y="1269733"/>
+                </a:lnTo>
+                <a:lnTo>
+                  <a:pt x="4445826" y="1262013"/>
+                </a:lnTo>
+                <a:lnTo>
+                  <a:pt x="4481680" y="1254309"/>
+                </a:lnTo>
+                <a:lnTo>
+                  <a:pt x="4517533" y="1246622"/>
+                </a:lnTo>
+                <a:lnTo>
+                  <a:pt x="4553387" y="1238957"/>
+                </a:lnTo>
+                <a:lnTo>
+                  <a:pt x="4589240" y="1231315"/>
+                </a:lnTo>
+                <a:lnTo>
+                  <a:pt x="4625094" y="1223701"/>
+                </a:lnTo>
+                <a:lnTo>
+                  <a:pt x="4660947" y="1216117"/>
+                </a:lnTo>
+                <a:lnTo>
+                  <a:pt x="4696801" y="1208565"/>
+                </a:lnTo>
+                <a:lnTo>
+                  <a:pt x="4732654" y="1201050"/>
+                </a:lnTo>
+                <a:lnTo>
+                  <a:pt x="4768507" y="1193575"/>
+                </a:lnTo>
+                <a:lnTo>
+                  <a:pt x="4804361" y="1186142"/>
+                </a:lnTo>
+                <a:lnTo>
+                  <a:pt x="4840214" y="1178755"/>
+                </a:lnTo>
+                <a:lnTo>
+                  <a:pt x="4876068" y="1171418"/>
+                </a:lnTo>
+                <a:lnTo>
+                  <a:pt x="4911921" y="1164132"/>
+                </a:lnTo>
+                <a:lnTo>
+                  <a:pt x="4947775" y="1156903"/>
+                </a:lnTo>
+                <a:lnTo>
+                  <a:pt x="4983628" y="1149732"/>
+                </a:lnTo>
+                <a:lnTo>
+                  <a:pt x="5019482" y="1142625"/>
+                </a:lnTo>
+                <a:lnTo>
+                  <a:pt x="5055335" y="1135583"/>
+                </a:lnTo>
+                <a:lnTo>
+                  <a:pt x="5091188" y="1128612"/>
+                </a:lnTo>
+                <a:lnTo>
+                  <a:pt x="5120639" y="1123063"/>
+                </a:lnTo>
+              </a:path>
+            </a:pathLst>
+          </a:custGeom>
+          <a:noFill/>
+          <a:ln w="40640">
             <a:solidFill>
               <a:srgbClr val="8EDBD4"/>
             </a:solidFill>
-            <a:headEnd type="none" w="med" len="med"/>
-            <a:tailEnd type="triangle" w="med" len="med"/>
           </a:ln>
           <a:effectLst/>
         </p:spPr>
-      </p:cxnSp>
-      <p:cxnSp>
-        <p:nvCxnSpPr>
-          <p:cNvPr id="10" name="arrow9" descr="sci-ppt:C1-E10-009"/>
-          <p:cNvCxnSpPr/>
+        <p:txBody>
+          <a:bodyPr rtlCol="0" anchor="ctr"/>
+          <a:lstStyle/>
+          <a:p>
+            <a:pPr algn="ctr"/>
+          </a:p>
+        </p:txBody>
+      </p:sp>
+      <p:sp>
+        <p:nvSpPr>
+          <p:cNvPr id="70" name="C1-E10 polygon 68" descr="sci-ppt:o068"/>
+          <p:cNvSpPr/>
           <p:nvPr/>
-        </p:nvCxnSpPr>
-        <p:spPr>
-          <a:xfrm>
-            <a:off x="7620000" y="2621280"/>
-            <a:ext cx="670560" cy="0"/>
-          </a:xfrm>
-          <a:prstGeom prst="line">
+        </p:nvSpPr>
+        <p:spPr>
+          <a:xfrm>
+            <a:off x="6675120" y="1870799"/>
+            <a:ext cx="5120639" cy="1626624"/>
+          </a:xfrm>
+          <a:custGeom>
             <a:avLst/>
-          </a:prstGeom>
-          <a:ln w="25400">
+            <a:gdLst/>
+            <a:ahLst/>
+            <a:cxnLst/>
+            <a:rect l="l" t="t" r="r" b="b"/>
+            <a:pathLst>
+              <a:path w="5120639" h="1626624">
+                <a:moveTo>
+                  <a:pt x="0" y="1283881"/>
+                </a:moveTo>
+                <a:lnTo>
+                  <a:pt x="35853" y="991068"/>
+                </a:lnTo>
+                <a:lnTo>
+                  <a:pt x="71706" y="718377"/>
+                </a:lnTo>
+                <a:lnTo>
+                  <a:pt x="107560" y="481253"/>
+                </a:lnTo>
+                <a:lnTo>
+                  <a:pt x="143413" y="289907"/>
+                </a:lnTo>
+                <a:lnTo>
+                  <a:pt x="179267" y="148695"/>
+                </a:lnTo>
+                <a:lnTo>
+                  <a:pt x="215120" y="56761"/>
+                </a:lnTo>
+                <a:lnTo>
+                  <a:pt x="250974" y="9466"/>
+                </a:lnTo>
+                <a:lnTo>
+                  <a:pt x="286827" y="0"/>
+                </a:lnTo>
+                <a:lnTo>
+                  <a:pt x="322680" y="20784"/>
+                </a:lnTo>
+                <a:lnTo>
+                  <a:pt x="358534" y="64473"/>
+                </a:lnTo>
+                <a:lnTo>
+                  <a:pt x="394387" y="124533"/>
+                </a:lnTo>
+                <a:lnTo>
+                  <a:pt x="430241" y="195502"/>
+                </a:lnTo>
+                <a:lnTo>
+                  <a:pt x="466094" y="273024"/>
+                </a:lnTo>
+                <a:lnTo>
+                  <a:pt x="501948" y="353751"/>
+                </a:lnTo>
+                <a:lnTo>
+                  <a:pt x="537801" y="435202"/>
+                </a:lnTo>
+                <a:lnTo>
+                  <a:pt x="573655" y="515595"/>
+                </a:lnTo>
+                <a:lnTo>
+                  <a:pt x="609508" y="593702"/>
+                </a:lnTo>
+                <a:lnTo>
+                  <a:pt x="645361" y="668712"/>
+                </a:lnTo>
+                <a:lnTo>
+                  <a:pt x="681215" y="740128"/>
+                </a:lnTo>
+                <a:lnTo>
+                  <a:pt x="717068" y="807682"/>
+                </a:lnTo>
+                <a:lnTo>
+                  <a:pt x="752922" y="871269"/>
+                </a:lnTo>
+                <a:lnTo>
+                  <a:pt x="788775" y="930898"/>
+                </a:lnTo>
+                <a:lnTo>
+                  <a:pt x="824629" y="986655"/>
+                </a:lnTo>
+                <a:lnTo>
+                  <a:pt x="860482" y="1038678"/>
+                </a:lnTo>
+                <a:lnTo>
+                  <a:pt x="896336" y="1087134"/>
+                </a:lnTo>
+                <a:lnTo>
+                  <a:pt x="932189" y="1132210"/>
+                </a:lnTo>
+                <a:lnTo>
+                  <a:pt x="968042" y="1174097"/>
+                </a:lnTo>
+                <a:lnTo>
+                  <a:pt x="1003896" y="1212990"/>
+                </a:lnTo>
+                <a:lnTo>
+                  <a:pt x="1039749" y="1249078"/>
+                </a:lnTo>
+                <a:lnTo>
+                  <a:pt x="1075603" y="1282543"/>
+                </a:lnTo>
+                <a:lnTo>
+                  <a:pt x="1111456" y="1313559"/>
+                </a:lnTo>
+                <a:lnTo>
+                  <a:pt x="1147310" y="1342290"/>
+                </a:lnTo>
+                <a:lnTo>
+                  <a:pt x="1183163" y="1368890"/>
+                </a:lnTo>
+                <a:lnTo>
+                  <a:pt x="1219017" y="1393502"/>
+                </a:lnTo>
+                <a:lnTo>
+                  <a:pt x="1254870" y="1416261"/>
+                </a:lnTo>
+                <a:lnTo>
+                  <a:pt x="1290723" y="1437291"/>
+                </a:lnTo>
+                <a:lnTo>
+                  <a:pt x="1326577" y="1456706"/>
+                </a:lnTo>
+                <a:lnTo>
+                  <a:pt x="1362430" y="1474613"/>
+                </a:lnTo>
+                <a:lnTo>
+                  <a:pt x="1398284" y="1491110"/>
+                </a:lnTo>
+                <a:lnTo>
+                  <a:pt x="1434137" y="1506288"/>
+                </a:lnTo>
+                <a:lnTo>
+                  <a:pt x="1469991" y="1520232"/>
+                </a:lnTo>
+                <a:lnTo>
+                  <a:pt x="1505844" y="1533018"/>
+                </a:lnTo>
+                <a:lnTo>
+                  <a:pt x="1541698" y="1544719"/>
+                </a:lnTo>
+                <a:lnTo>
+                  <a:pt x="1577551" y="1555400"/>
+                </a:lnTo>
+                <a:lnTo>
+                  <a:pt x="1613404" y="1565124"/>
+                </a:lnTo>
+                <a:lnTo>
+                  <a:pt x="1649258" y="1573947"/>
+                </a:lnTo>
+                <a:lnTo>
+                  <a:pt x="1685111" y="1581922"/>
+                </a:lnTo>
+                <a:lnTo>
+                  <a:pt x="1720965" y="1589097"/>
+                </a:lnTo>
+                <a:lnTo>
+                  <a:pt x="1756818" y="1595519"/>
+                </a:lnTo>
+                <a:lnTo>
+                  <a:pt x="1792672" y="1601229"/>
+                </a:lnTo>
+                <a:lnTo>
+                  <a:pt x="1828525" y="1606266"/>
+                </a:lnTo>
+                <a:lnTo>
+                  <a:pt x="1864379" y="1610667"/>
+                </a:lnTo>
+                <a:lnTo>
+                  <a:pt x="1900232" y="1614467"/>
+                </a:lnTo>
+                <a:lnTo>
+                  <a:pt x="1936085" y="1617696"/>
+                </a:lnTo>
+                <a:lnTo>
+                  <a:pt x="1971939" y="1620384"/>
+                </a:lnTo>
+                <a:lnTo>
+                  <a:pt x="2007792" y="1622559"/>
+                </a:lnTo>
+                <a:lnTo>
+                  <a:pt x="2043646" y="1624247"/>
+                </a:lnTo>
+                <a:lnTo>
+                  <a:pt x="2079499" y="1625472"/>
+                </a:lnTo>
+                <a:lnTo>
+                  <a:pt x="2115353" y="1626258"/>
+                </a:lnTo>
+                <a:lnTo>
+                  <a:pt x="2151206" y="1626624"/>
+                </a:lnTo>
+                <a:lnTo>
+                  <a:pt x="2187060" y="1626592"/>
+                </a:lnTo>
+                <a:lnTo>
+                  <a:pt x="2222913" y="1626180"/>
+                </a:lnTo>
+                <a:lnTo>
+                  <a:pt x="2258766" y="1625406"/>
+                </a:lnTo>
+                <a:lnTo>
+                  <a:pt x="2294620" y="1624287"/>
+                </a:lnTo>
+                <a:lnTo>
+                  <a:pt x="2330473" y="1622838"/>
+                </a:lnTo>
+                <a:lnTo>
+                  <a:pt x="2366327" y="1621075"/>
+                </a:lnTo>
+                <a:lnTo>
+                  <a:pt x="2402180" y="1619011"/>
+                </a:lnTo>
+                <a:lnTo>
+                  <a:pt x="2438034" y="1616661"/>
+                </a:lnTo>
+                <a:lnTo>
+                  <a:pt x="2473887" y="1614036"/>
+                </a:lnTo>
+                <a:lnTo>
+                  <a:pt x="2509741" y="1611149"/>
+                </a:lnTo>
+                <a:lnTo>
+                  <a:pt x="2545594" y="1608011"/>
+                </a:lnTo>
+                <a:lnTo>
+                  <a:pt x="2581447" y="1604632"/>
+                </a:lnTo>
+                <a:lnTo>
+                  <a:pt x="2617301" y="1601024"/>
+                </a:lnTo>
+                <a:lnTo>
+                  <a:pt x="2653154" y="1597196"/>
+                </a:lnTo>
+                <a:lnTo>
+                  <a:pt x="2689008" y="1593157"/>
+                </a:lnTo>
+                <a:lnTo>
+                  <a:pt x="2724861" y="1588917"/>
+                </a:lnTo>
+                <a:lnTo>
+                  <a:pt x="2760715" y="1584483"/>
+                </a:lnTo>
+                <a:lnTo>
+                  <a:pt x="2796568" y="1579864"/>
+                </a:lnTo>
+                <a:lnTo>
+                  <a:pt x="2832422" y="1575068"/>
+                </a:lnTo>
+                <a:lnTo>
+                  <a:pt x="2868275" y="1570102"/>
+                </a:lnTo>
+                <a:lnTo>
+                  <a:pt x="2904128" y="1564974"/>
+                </a:lnTo>
+                <a:lnTo>
+                  <a:pt x="2939982" y="1559690"/>
+                </a:lnTo>
+                <a:lnTo>
+                  <a:pt x="2975835" y="1554256"/>
+                </a:lnTo>
+                <a:lnTo>
+                  <a:pt x="3011689" y="1548680"/>
+                </a:lnTo>
+                <a:lnTo>
+                  <a:pt x="3047542" y="1542967"/>
+                </a:lnTo>
+                <a:lnTo>
+                  <a:pt x="3083396" y="1537123"/>
+                </a:lnTo>
+                <a:lnTo>
+                  <a:pt x="3119249" y="1531154"/>
+                </a:lnTo>
+                <a:lnTo>
+                  <a:pt x="3155103" y="1525066"/>
+                </a:lnTo>
+                <a:lnTo>
+                  <a:pt x="3190956" y="1518863"/>
+                </a:lnTo>
+                <a:lnTo>
+                  <a:pt x="3226809" y="1512551"/>
+                </a:lnTo>
+                <a:lnTo>
+                  <a:pt x="3262663" y="1506134"/>
+                </a:lnTo>
+                <a:lnTo>
+                  <a:pt x="3298516" y="1499618"/>
+                </a:lnTo>
+                <a:lnTo>
+                  <a:pt x="3334370" y="1493008"/>
+                </a:lnTo>
+                <a:lnTo>
+                  <a:pt x="3370223" y="1486307"/>
+                </a:lnTo>
+                <a:lnTo>
+                  <a:pt x="3406077" y="1479520"/>
+                </a:lnTo>
+                <a:lnTo>
+                  <a:pt x="3441930" y="1472651"/>
+                </a:lnTo>
+                <a:lnTo>
+                  <a:pt x="3477784" y="1465705"/>
+                </a:lnTo>
+                <a:lnTo>
+                  <a:pt x="3513637" y="1458686"/>
+                </a:lnTo>
+                <a:lnTo>
+                  <a:pt x="3549490" y="1451597"/>
+                </a:lnTo>
+                <a:lnTo>
+                  <a:pt x="3585344" y="1444442"/>
+                </a:lnTo>
+                <a:lnTo>
+                  <a:pt x="3621197" y="1437226"/>
+                </a:lnTo>
+                <a:lnTo>
+                  <a:pt x="3657051" y="1429952"/>
+                </a:lnTo>
+                <a:lnTo>
+                  <a:pt x="3692904" y="1422623"/>
+                </a:lnTo>
+                <a:lnTo>
+                  <a:pt x="3728758" y="1415244"/>
+                </a:lnTo>
+                <a:lnTo>
+                  <a:pt x="3764611" y="1407817"/>
+                </a:lnTo>
+                <a:lnTo>
+                  <a:pt x="3800464" y="1400346"/>
+                </a:lnTo>
+                <a:lnTo>
+                  <a:pt x="3836318" y="1392835"/>
+                </a:lnTo>
+                <a:lnTo>
+                  <a:pt x="3872171" y="1385286"/>
+                </a:lnTo>
+                <a:lnTo>
+                  <a:pt x="3908025" y="1377704"/>
+                </a:lnTo>
+                <a:lnTo>
+                  <a:pt x="3943878" y="1370091"/>
+                </a:lnTo>
+                <a:lnTo>
+                  <a:pt x="3979732" y="1362450"/>
+                </a:lnTo>
+                <a:lnTo>
+                  <a:pt x="4015585" y="1354785"/>
+                </a:lnTo>
+                <a:lnTo>
+                  <a:pt x="4051439" y="1347098"/>
+                </a:lnTo>
+                <a:lnTo>
+                  <a:pt x="4087292" y="1339394"/>
+                </a:lnTo>
+                <a:lnTo>
+                  <a:pt x="4123145" y="1331674"/>
+                </a:lnTo>
+                <a:lnTo>
+                  <a:pt x="4158999" y="1323943"/>
+                </a:lnTo>
+                <a:lnTo>
+                  <a:pt x="4194852" y="1316202"/>
+                </a:lnTo>
+                <a:lnTo>
+                  <a:pt x="4230706" y="1308456"/>
+                </a:lnTo>
+                <a:lnTo>
+                  <a:pt x="4266559" y="1300706"/>
+                </a:lnTo>
+                <a:lnTo>
+                  <a:pt x="4302413" y="1292957"/>
+                </a:lnTo>
+                <a:lnTo>
+                  <a:pt x="4338266" y="1285211"/>
+                </a:lnTo>
+                <a:lnTo>
+                  <a:pt x="4374120" y="1277470"/>
+                </a:lnTo>
+                <a:lnTo>
+                  <a:pt x="4409973" y="1269739"/>
+                </a:lnTo>
+                <a:lnTo>
+                  <a:pt x="4445826" y="1262019"/>
+                </a:lnTo>
+                <a:lnTo>
+                  <a:pt x="4481680" y="1254315"/>
+                </a:lnTo>
+                <a:lnTo>
+                  <a:pt x="4517533" y="1246628"/>
+                </a:lnTo>
+                <a:lnTo>
+                  <a:pt x="4553387" y="1238963"/>
+                </a:lnTo>
+                <a:lnTo>
+                  <a:pt x="4589240" y="1231321"/>
+                </a:lnTo>
+                <a:lnTo>
+                  <a:pt x="4625094" y="1223707"/>
+                </a:lnTo>
+                <a:lnTo>
+                  <a:pt x="4660947" y="1216123"/>
+                </a:lnTo>
+                <a:lnTo>
+                  <a:pt x="4696801" y="1208571"/>
+                </a:lnTo>
+                <a:lnTo>
+                  <a:pt x="4732654" y="1201056"/>
+                </a:lnTo>
+                <a:lnTo>
+                  <a:pt x="4768507" y="1193581"/>
+                </a:lnTo>
+                <a:lnTo>
+                  <a:pt x="4804361" y="1186148"/>
+                </a:lnTo>
+                <a:lnTo>
+                  <a:pt x="4840214" y="1178761"/>
+                </a:lnTo>
+                <a:lnTo>
+                  <a:pt x="4876068" y="1171424"/>
+                </a:lnTo>
+                <a:lnTo>
+                  <a:pt x="4911921" y="1164138"/>
+                </a:lnTo>
+                <a:lnTo>
+                  <a:pt x="4947775" y="1156909"/>
+                </a:lnTo>
+                <a:lnTo>
+                  <a:pt x="4983628" y="1149738"/>
+                </a:lnTo>
+                <a:lnTo>
+                  <a:pt x="5019482" y="1142631"/>
+                </a:lnTo>
+                <a:lnTo>
+                  <a:pt x="5055335" y="1135589"/>
+                </a:lnTo>
+                <a:lnTo>
+                  <a:pt x="5091188" y="1128618"/>
+                </a:lnTo>
+                <a:lnTo>
+                  <a:pt x="5120639" y="1122946"/>
+                </a:lnTo>
+              </a:path>
+            </a:pathLst>
+          </a:custGeom>
+          <a:noFill/>
+          <a:ln w="20320">
             <a:solidFill>
-              <a:srgbClr val="8EDBD4"/>
+              <a:srgbClr val="FFFFFF"/>
             </a:solidFill>
-            <a:headEnd type="none" w="med" len="med"/>
-            <a:tailEnd type="triangle" w="med" len="med"/>
+            <a:prstDash val="dash"/>
           </a:ln>
           <a:effectLst/>
         </p:spPr>
-      </p:cxnSp>
-      <p:sp>
-        <p:nvSpPr>
-          <p:cNvPr id="11" name="text10" descr="sci-ppt:C1-E10-010"/>
+        <p:txBody>
+          <a:bodyPr rtlCol="0" anchor="ctr"/>
+          <a:lstStyle/>
+          <a:p>
+            <a:pPr algn="ctr"/>
+          </a:p>
+        </p:txBody>
+      </p:sp>
+      <p:sp>
+        <p:nvSpPr>
+          <p:cNvPr id="71" name="C1-E10 polygon 69" descr="sci-ppt:o069"/>
+          <p:cNvSpPr/>
+          <p:nvPr/>
+        </p:nvSpPr>
+        <p:spPr>
+          <a:xfrm>
+            <a:off x="6675120" y="3063131"/>
+            <a:ext cx="5120639" cy="113428"/>
+          </a:xfrm>
+          <a:custGeom>
+            <a:avLst/>
+            <a:gdLst/>
+            <a:ahLst/>
+            <a:cxnLst/>
+            <a:rect l="l" t="t" r="r" b="b"/>
+            <a:pathLst>
+              <a:path w="5120639" h="113428">
+                <a:moveTo>
+                  <a:pt x="0" y="91373"/>
+                </a:moveTo>
+                <a:lnTo>
+                  <a:pt x="35853" y="81767"/>
+                </a:lnTo>
+                <a:lnTo>
+                  <a:pt x="71706" y="72214"/>
+                </a:lnTo>
+                <a:lnTo>
+                  <a:pt x="107560" y="63082"/>
+                </a:lnTo>
+                <a:lnTo>
+                  <a:pt x="143413" y="54523"/>
+                </a:lnTo>
+                <a:lnTo>
+                  <a:pt x="179267" y="46647"/>
+                </a:lnTo>
+                <a:lnTo>
+                  <a:pt x="215120" y="39514"/>
+                </a:lnTo>
+                <a:lnTo>
+                  <a:pt x="250974" y="33146"/>
+                </a:lnTo>
+                <a:lnTo>
+                  <a:pt x="286827" y="27531"/>
+                </a:lnTo>
+                <a:lnTo>
+                  <a:pt x="322680" y="22632"/>
+                </a:lnTo>
+                <a:lnTo>
+                  <a:pt x="358534" y="18399"/>
+                </a:lnTo>
+                <a:lnTo>
+                  <a:pt x="394387" y="14774"/>
+                </a:lnTo>
+                <a:lnTo>
+                  <a:pt x="430241" y="11695"/>
+                </a:lnTo>
+                <a:lnTo>
+                  <a:pt x="466094" y="9105"/>
+                </a:lnTo>
+                <a:lnTo>
+                  <a:pt x="501948" y="6945"/>
+                </a:lnTo>
+                <a:lnTo>
+                  <a:pt x="537801" y="5165"/>
+                </a:lnTo>
+                <a:lnTo>
+                  <a:pt x="573655" y="3717"/>
+                </a:lnTo>
+                <a:lnTo>
+                  <a:pt x="609508" y="2562"/>
+                </a:lnTo>
+                <a:lnTo>
+                  <a:pt x="645361" y="1661"/>
+                </a:lnTo>
+                <a:lnTo>
+                  <a:pt x="681215" y="984"/>
+                </a:lnTo>
+                <a:lnTo>
+                  <a:pt x="717068" y="502"/>
+                </a:lnTo>
+                <a:lnTo>
+                  <a:pt x="752922" y="191"/>
+                </a:lnTo>
+                <a:lnTo>
+                  <a:pt x="788775" y="30"/>
+                </a:lnTo>
+                <a:lnTo>
+                  <a:pt x="824629" y="0"/>
+                </a:lnTo>
+                <a:lnTo>
+                  <a:pt x="860482" y="86"/>
+                </a:lnTo>
+                <a:lnTo>
+                  <a:pt x="896336" y="275"/>
+                </a:lnTo>
+                <a:lnTo>
+                  <a:pt x="932189" y="553"/>
+                </a:lnTo>
+                <a:lnTo>
+                  <a:pt x="968042" y="911"/>
+                </a:lnTo>
+                <a:lnTo>
+                  <a:pt x="1003896" y="1339"/>
+                </a:lnTo>
+                <a:lnTo>
+                  <a:pt x="1039749" y="1830"/>
+                </a:lnTo>
+                <a:lnTo>
+                  <a:pt x="1075603" y="2376"/>
+                </a:lnTo>
+                <a:lnTo>
+                  <a:pt x="1111456" y="2971"/>
+                </a:lnTo>
+                <a:lnTo>
+                  <a:pt x="1147310" y="3611"/>
+                </a:lnTo>
+                <a:lnTo>
+                  <a:pt x="1183163" y="4290"/>
+                </a:lnTo>
+                <a:lnTo>
+                  <a:pt x="1219017" y="5004"/>
+                </a:lnTo>
+                <a:lnTo>
+                  <a:pt x="1254870" y="5749"/>
+                </a:lnTo>
+                <a:lnTo>
+                  <a:pt x="1290723" y="6523"/>
+                </a:lnTo>
+                <a:lnTo>
+                  <a:pt x="1326577" y="7322"/>
+                </a:lnTo>
+                <a:lnTo>
+                  <a:pt x="1362430" y="8143"/>
+                </a:lnTo>
+                <a:lnTo>
+                  <a:pt x="1398284" y="8985"/>
+                </a:lnTo>
+                <a:lnTo>
+                  <a:pt x="1434137" y="9846"/>
+                </a:lnTo>
+                <a:lnTo>
+                  <a:pt x="1469991" y="10723"/>
+                </a:lnTo>
+                <a:lnTo>
+                  <a:pt x="1505844" y="11615"/>
+                </a:lnTo>
+                <a:lnTo>
+                  <a:pt x="1541698" y="12520"/>
+                </a:lnTo>
+                <a:lnTo>
+                  <a:pt x="1577551" y="13438"/>
+                </a:lnTo>
+                <a:lnTo>
+                  <a:pt x="1613404" y="14366"/>
+                </a:lnTo>
+                <a:lnTo>
+                  <a:pt x="1649258" y="15305"/>
+                </a:lnTo>
+                <a:lnTo>
+                  <a:pt x="1685111" y="16253"/>
+                </a:lnTo>
+                <a:lnTo>
+                  <a:pt x="1720965" y="17209"/>
+                </a:lnTo>
+                <a:lnTo>
+                  <a:pt x="1756818" y="18172"/>
+                </a:lnTo>
+                <a:lnTo>
+                  <a:pt x="1792672" y="19141"/>
+                </a:lnTo>
+                <a:lnTo>
+                  <a:pt x="1828525" y="20117"/>
+                </a:lnTo>
+                <a:lnTo>
+                  <a:pt x="1864379" y="21099"/>
+                </a:lnTo>
+                <a:lnTo>
+                  <a:pt x="1900232" y="22085"/>
+                </a:lnTo>
+                <a:lnTo>
+                  <a:pt x="1936085" y="23075"/>
+                </a:lnTo>
+                <a:lnTo>
+                  <a:pt x="1971939" y="24070"/>
+                </a:lnTo>
+                <a:lnTo>
+                  <a:pt x="2007792" y="25069"/>
+                </a:lnTo>
+                <a:lnTo>
+                  <a:pt x="2043646" y="26070"/>
+                </a:lnTo>
+                <a:lnTo>
+                  <a:pt x="2079499" y="27075"/>
+                </a:lnTo>
+                <a:lnTo>
+                  <a:pt x="2115353" y="28082"/>
+                </a:lnTo>
+                <a:lnTo>
+                  <a:pt x="2151206" y="29092"/>
+                </a:lnTo>
+                <a:lnTo>
+                  <a:pt x="2187060" y="30103"/>
+                </a:lnTo>
+                <a:lnTo>
+                  <a:pt x="2222913" y="31117"/>
+                </a:lnTo>
+                <a:lnTo>
+                  <a:pt x="2258766" y="32133"/>
+                </a:lnTo>
+                <a:lnTo>
+                  <a:pt x="2294620" y="33150"/>
+                </a:lnTo>
+                <a:lnTo>
+                  <a:pt x="2330473" y="34168"/>
+                </a:lnTo>
+                <a:lnTo>
+                  <a:pt x="2366327" y="35187"/>
+                </a:lnTo>
+                <a:lnTo>
+                  <a:pt x="2402180" y="36208"/>
+                </a:lnTo>
+                <a:lnTo>
+                  <a:pt x="2438034" y="37230"/>
+                </a:lnTo>
+                <a:lnTo>
+                  <a:pt x="2473887" y="38252"/>
+                </a:lnTo>
+                <a:lnTo>
+                  <a:pt x="2509741" y="39275"/>
+                </a:lnTo>
+                <a:lnTo>
+                  <a:pt x="2545594" y="40299"/>
+                </a:lnTo>
+                <a:lnTo>
+                  <a:pt x="2581447" y="41323"/>
+                </a:lnTo>
+                <a:lnTo>
+                  <a:pt x="2617301" y="42347"/>
+                </a:lnTo>
+                <a:lnTo>
+                  <a:pt x="2653154" y="43372"/>
+                </a:lnTo>
+                <a:lnTo>
+                  <a:pt x="2689008" y="44397"/>
+                </a:lnTo>
+                <a:lnTo>
+                  <a:pt x="2724861" y="45423"/>
+                </a:lnTo>
+                <a:lnTo>
+                  <a:pt x="2760715" y="46448"/>
+                </a:lnTo>
+                <a:lnTo>
+                  <a:pt x="2796568" y="47474"/>
+                </a:lnTo>
+                <a:lnTo>
+                  <a:pt x="2832422" y="48500"/>
+                </a:lnTo>
+                <a:lnTo>
+                  <a:pt x="2868275" y="49526"/>
+                </a:lnTo>
+                <a:lnTo>
+                  <a:pt x="2904128" y="50551"/>
+                </a:lnTo>
+                <a:lnTo>
+                  <a:pt x="2939982" y="51577"/>
+                </a:lnTo>
+                <a:lnTo>
+                  <a:pt x="2975835" y="52603"/>
+                </a:lnTo>
+                <a:lnTo>
+                  <a:pt x="3011689" y="53628"/>
+                </a:lnTo>
+                <a:lnTo>
+                  <a:pt x="3047542" y="54653"/>
+                </a:lnTo>
+                <a:lnTo>
+                  <a:pt x="3083396" y="55678"/>
+                </a:lnTo>
+                <a:lnTo>
+                  <a:pt x="3119249" y="56703"/>
+                </a:lnTo>
+                <a:lnTo>
+                  <a:pt x="3155103" y="57728"/>
+                </a:lnTo>
+                <a:lnTo>
+                  <a:pt x="3190956" y="58753"/>
+                </a:lnTo>
+                <a:lnTo>
+                  <a:pt x="3226809" y="59777"/>
+                </a:lnTo>
+                <a:lnTo>
+                  <a:pt x="3262663" y="60801"/>
+                </a:lnTo>
+                <a:lnTo>
+                  <a:pt x="3298516" y="61824"/>
+                </a:lnTo>
+                <a:lnTo>
+                  <a:pt x="3334370" y="62848"/>
+                </a:lnTo>
+                <a:lnTo>
+                  <a:pt x="3370223" y="63871"/>
+                </a:lnTo>
+                <a:lnTo>
+                  <a:pt x="3406077" y="64894"/>
+                </a:lnTo>
+                <a:lnTo>
+                  <a:pt x="3441930" y="65916"/>
+                </a:lnTo>
+                <a:lnTo>
+                  <a:pt x="3477784" y="66938"/>
+                </a:lnTo>
+                <a:lnTo>
+                  <a:pt x="3513637" y="67960"/>
+                </a:lnTo>
+                <a:lnTo>
+                  <a:pt x="3549490" y="68982"/>
+                </a:lnTo>
+                <a:lnTo>
+                  <a:pt x="3585344" y="70003"/>
+                </a:lnTo>
+                <a:lnTo>
+                  <a:pt x="3621197" y="71024"/>
+                </a:lnTo>
+                <a:lnTo>
+                  <a:pt x="3657051" y="72045"/>
+                </a:lnTo>
+                <a:lnTo>
+                  <a:pt x="3692904" y="73065"/>
+                </a:lnTo>
+                <a:lnTo>
+                  <a:pt x="3728758" y="74085"/>
+                </a:lnTo>
+                <a:lnTo>
+                  <a:pt x="3764611" y="75104"/>
+                </a:lnTo>
+                <a:lnTo>
+                  <a:pt x="3800464" y="76124"/>
+                </a:lnTo>
+                <a:lnTo>
+                  <a:pt x="3836318" y="77142"/>
+                </a:lnTo>
+                <a:lnTo>
+                  <a:pt x="3872171" y="78161"/>
+                </a:lnTo>
+                <a:lnTo>
+                  <a:pt x="3908025" y="79179"/>
+                </a:lnTo>
+                <a:lnTo>
+                  <a:pt x="3943878" y="80197"/>
+                </a:lnTo>
+                <a:lnTo>
+                  <a:pt x="3979732" y="81215"/>
+                </a:lnTo>
+                <a:lnTo>
+                  <a:pt x="4015585" y="82232"/>
+                </a:lnTo>
+                <a:lnTo>
+                  <a:pt x="4051439" y="83249"/>
+                </a:lnTo>
+                <a:lnTo>
+                  <a:pt x="4087292" y="84266"/>
+                </a:lnTo>
+                <a:lnTo>
+                  <a:pt x="4123145" y="85282"/>
+                </a:lnTo>
+                <a:lnTo>
+                  <a:pt x="4158999" y="86298"/>
+                </a:lnTo>
+                <a:lnTo>
+                  <a:pt x="4194852" y="87314"/>
+                </a:lnTo>
+                <a:lnTo>
+                  <a:pt x="4230706" y="88330"/>
+                </a:lnTo>
+                <a:lnTo>
+                  <a:pt x="4266559" y="89345"/>
+                </a:lnTo>
+                <a:lnTo>
+                  <a:pt x="4302413" y="90360"/>
+                </a:lnTo>
+                <a:lnTo>
+                  <a:pt x="4338266" y="91374"/>
+                </a:lnTo>
+                <a:lnTo>
+                  <a:pt x="4374120" y="92389"/>
+                </a:lnTo>
+                <a:lnTo>
+                  <a:pt x="4409973" y="93403"/>
+                </a:lnTo>
+                <a:lnTo>
+                  <a:pt x="4445826" y="94416"/>
+                </a:lnTo>
+                <a:lnTo>
+                  <a:pt x="4481680" y="95430"/>
+                </a:lnTo>
+                <a:lnTo>
+                  <a:pt x="4517533" y="96443"/>
+                </a:lnTo>
+                <a:lnTo>
+                  <a:pt x="4553387" y="97456"/>
+                </a:lnTo>
+                <a:lnTo>
+                  <a:pt x="4589240" y="98469"/>
+                </a:lnTo>
+                <a:lnTo>
+                  <a:pt x="4625094" y="99481"/>
+                </a:lnTo>
+                <a:lnTo>
+                  <a:pt x="4660947" y="100493"/>
+                </a:lnTo>
+                <a:lnTo>
+                  <a:pt x="4696801" y="101505"/>
+                </a:lnTo>
+                <a:lnTo>
+                  <a:pt x="4732654" y="102517"/>
+                </a:lnTo>
+                <a:lnTo>
+                  <a:pt x="4768507" y="103528"/>
+                </a:lnTo>
+                <a:lnTo>
+                  <a:pt x="4804361" y="104539"/>
+                </a:lnTo>
+                <a:lnTo>
+                  <a:pt x="4840214" y="105550"/>
+                </a:lnTo>
+                <a:lnTo>
+                  <a:pt x="4876068" y="106560"/>
+                </a:lnTo>
+                <a:lnTo>
+                  <a:pt x="4911921" y="107570"/>
+                </a:lnTo>
+                <a:lnTo>
+                  <a:pt x="4947775" y="108580"/>
+                </a:lnTo>
+                <a:lnTo>
+                  <a:pt x="4983628" y="109590"/>
+                </a:lnTo>
+                <a:lnTo>
+                  <a:pt x="5019482" y="110599"/>
+                </a:lnTo>
+                <a:lnTo>
+                  <a:pt x="5055335" y="111608"/>
+                </a:lnTo>
+                <a:lnTo>
+                  <a:pt x="5091188" y="112617"/>
+                </a:lnTo>
+                <a:lnTo>
+                  <a:pt x="5120639" y="113428"/>
+                </a:lnTo>
+              </a:path>
+            </a:pathLst>
+          </a:custGeom>
+          <a:noFill/>
+          <a:ln w="40640">
+            <a:solidFill>
+              <a:srgbClr val="F28BA0"/>
+            </a:solidFill>
+          </a:ln>
+          <a:effectLst/>
+        </p:spPr>
+        <p:txBody>
+          <a:bodyPr rtlCol="0" anchor="ctr"/>
+          <a:lstStyle/>
+          <a:p>
+            <a:pPr algn="ctr"/>
+          </a:p>
+        </p:txBody>
+      </p:sp>
+      <p:sp>
+        <p:nvSpPr>
+          <p:cNvPr id="72" name="C1-E10 polygon 70" descr="sci-ppt:o070"/>
+          <p:cNvSpPr/>
+          <p:nvPr/>
+        </p:nvSpPr>
+        <p:spPr>
+          <a:xfrm>
+            <a:off x="6675120" y="3063131"/>
+            <a:ext cx="5120639" cy="113446"/>
+          </a:xfrm>
+          <a:custGeom>
+            <a:avLst/>
+            <a:gdLst/>
+            <a:ahLst/>
+            <a:cxnLst/>
+            <a:rect l="l" t="t" r="r" b="b"/>
+            <a:pathLst>
+              <a:path w="5120639" h="113446">
+                <a:moveTo>
+                  <a:pt x="0" y="91549"/>
+                </a:moveTo>
+                <a:lnTo>
+                  <a:pt x="35853" y="81767"/>
+                </a:lnTo>
+                <a:lnTo>
+                  <a:pt x="71706" y="72214"/>
+                </a:lnTo>
+                <a:lnTo>
+                  <a:pt x="107560" y="63082"/>
+                </a:lnTo>
+                <a:lnTo>
+                  <a:pt x="143413" y="54523"/>
+                </a:lnTo>
+                <a:lnTo>
+                  <a:pt x="179267" y="46646"/>
+                </a:lnTo>
+                <a:lnTo>
+                  <a:pt x="215120" y="39514"/>
+                </a:lnTo>
+                <a:lnTo>
+                  <a:pt x="250974" y="33146"/>
+                </a:lnTo>
+                <a:lnTo>
+                  <a:pt x="286827" y="27531"/>
+                </a:lnTo>
+                <a:lnTo>
+                  <a:pt x="322680" y="22632"/>
+                </a:lnTo>
+                <a:lnTo>
+                  <a:pt x="358534" y="18399"/>
+                </a:lnTo>
+                <a:lnTo>
+                  <a:pt x="394387" y="14774"/>
+                </a:lnTo>
+                <a:lnTo>
+                  <a:pt x="430241" y="11695"/>
+                </a:lnTo>
+                <a:lnTo>
+                  <a:pt x="466094" y="9104"/>
+                </a:lnTo>
+                <a:lnTo>
+                  <a:pt x="501948" y="6945"/>
+                </a:lnTo>
+                <a:lnTo>
+                  <a:pt x="537801" y="5165"/>
+                </a:lnTo>
+                <a:lnTo>
+                  <a:pt x="573655" y="3717"/>
+                </a:lnTo>
+                <a:lnTo>
+                  <a:pt x="609508" y="2562"/>
+                </a:lnTo>
+                <a:lnTo>
+                  <a:pt x="645361" y="1661"/>
+                </a:lnTo>
+                <a:lnTo>
+                  <a:pt x="681215" y="984"/>
+                </a:lnTo>
+                <a:lnTo>
+                  <a:pt x="717068" y="502"/>
+                </a:lnTo>
+                <a:lnTo>
+                  <a:pt x="752922" y="191"/>
+                </a:lnTo>
+                <a:lnTo>
+                  <a:pt x="788775" y="30"/>
+                </a:lnTo>
+                <a:lnTo>
+                  <a:pt x="824629" y="0"/>
+                </a:lnTo>
+                <a:lnTo>
+                  <a:pt x="860482" y="86"/>
+                </a:lnTo>
+                <a:lnTo>
+                  <a:pt x="896336" y="275"/>
+                </a:lnTo>
+                <a:lnTo>
+                  <a:pt x="932189" y="553"/>
+                </a:lnTo>
+                <a:lnTo>
+                  <a:pt x="968042" y="911"/>
+                </a:lnTo>
+                <a:lnTo>
+                  <a:pt x="1003896" y="1339"/>
+                </a:lnTo>
+                <a:lnTo>
+                  <a:pt x="1039749" y="1830"/>
+                </a:lnTo>
+                <a:lnTo>
+                  <a:pt x="1075603" y="2376"/>
+                </a:lnTo>
+                <a:lnTo>
+                  <a:pt x="1111456" y="2971"/>
+                </a:lnTo>
+                <a:lnTo>
+                  <a:pt x="1147310" y="3611"/>
+                </a:lnTo>
+                <a:lnTo>
+                  <a:pt x="1183163" y="4290"/>
+                </a:lnTo>
+                <a:lnTo>
+                  <a:pt x="1219017" y="5004"/>
+                </a:lnTo>
+                <a:lnTo>
+                  <a:pt x="1254870" y="5749"/>
+                </a:lnTo>
+                <a:lnTo>
+                  <a:pt x="1290723" y="6523"/>
+                </a:lnTo>
+                <a:lnTo>
+                  <a:pt x="1326577" y="7322"/>
+                </a:lnTo>
+                <a:lnTo>
+                  <a:pt x="1362430" y="8143"/>
+                </a:lnTo>
+                <a:lnTo>
+                  <a:pt x="1398284" y="8985"/>
+                </a:lnTo>
+                <a:lnTo>
+                  <a:pt x="1434137" y="9846"/>
+                </a:lnTo>
+                <a:lnTo>
+                  <a:pt x="1469991" y="10723"/>
+                </a:lnTo>
+                <a:lnTo>
+                  <a:pt x="1505844" y="11615"/>
+                </a:lnTo>
+                <a:lnTo>
+                  <a:pt x="1541698" y="12520"/>
+                </a:lnTo>
+                <a:lnTo>
+                  <a:pt x="1577551" y="13438"/>
+                </a:lnTo>
+                <a:lnTo>
+                  <a:pt x="1613404" y="14366"/>
+                </a:lnTo>
+                <a:lnTo>
+                  <a:pt x="1649258" y="15305"/>
+                </a:lnTo>
+                <a:lnTo>
+                  <a:pt x="1685111" y="16253"/>
+                </a:lnTo>
+                <a:lnTo>
+                  <a:pt x="1720965" y="17209"/>
+                </a:lnTo>
+                <a:lnTo>
+                  <a:pt x="1756818" y="18172"/>
+                </a:lnTo>
+                <a:lnTo>
+                  <a:pt x="1792672" y="19141"/>
+                </a:lnTo>
+                <a:lnTo>
+                  <a:pt x="1828525" y="20117"/>
+                </a:lnTo>
+                <a:lnTo>
+                  <a:pt x="1864379" y="21099"/>
+                </a:lnTo>
+                <a:lnTo>
+                  <a:pt x="1900232" y="22085"/>
+                </a:lnTo>
+                <a:lnTo>
+                  <a:pt x="1936085" y="23075"/>
+                </a:lnTo>
+                <a:lnTo>
+                  <a:pt x="1971939" y="24070"/>
+                </a:lnTo>
+                <a:lnTo>
+                  <a:pt x="2007792" y="25069"/>
+                </a:lnTo>
+                <a:lnTo>
+                  <a:pt x="2043646" y="26070"/>
+                </a:lnTo>
+                <a:lnTo>
+                  <a:pt x="2079499" y="27075"/>
+                </a:lnTo>
+                <a:lnTo>
+                  <a:pt x="2115353" y="28082"/>
+                </a:lnTo>
+                <a:lnTo>
+                  <a:pt x="2151206" y="29092"/>
+                </a:lnTo>
+                <a:lnTo>
+                  <a:pt x="2187060" y="30103"/>
+                </a:lnTo>
+                <a:lnTo>
+                  <a:pt x="2222913" y="31117"/>
+                </a:lnTo>
+                <a:lnTo>
+                  <a:pt x="2258766" y="32133"/>
+                </a:lnTo>
+                <a:lnTo>
+                  <a:pt x="2294620" y="33150"/>
+                </a:lnTo>
+                <a:lnTo>
+                  <a:pt x="2330473" y="34168"/>
+                </a:lnTo>
+                <a:lnTo>
+                  <a:pt x="2366327" y="35187"/>
+                </a:lnTo>
+                <a:lnTo>
+                  <a:pt x="2402180" y="36208"/>
+                </a:lnTo>
+                <a:lnTo>
+                  <a:pt x="2438034" y="37230"/>
+                </a:lnTo>
+                <a:lnTo>
+                  <a:pt x="2473887" y="38252"/>
+                </a:lnTo>
+                <a:lnTo>
+                  <a:pt x="2509741" y="39275"/>
+                </a:lnTo>
+                <a:lnTo>
+                  <a:pt x="2545594" y="40299"/>
+                </a:lnTo>
+                <a:lnTo>
+                  <a:pt x="2581447" y="41323"/>
+                </a:lnTo>
+                <a:lnTo>
+                  <a:pt x="2617301" y="42347"/>
+                </a:lnTo>
+                <a:lnTo>
+                  <a:pt x="2653154" y="43372"/>
+                </a:lnTo>
+                <a:lnTo>
+                  <a:pt x="2689008" y="44397"/>
+                </a:lnTo>
+                <a:lnTo>
+                  <a:pt x="2724861" y="45423"/>
+                </a:lnTo>
+                <a:lnTo>
+                  <a:pt x="2760715" y="46448"/>
+                </a:lnTo>
+                <a:lnTo>
+                  <a:pt x="2796568" y="47474"/>
+                </a:lnTo>
+                <a:lnTo>
+                  <a:pt x="2832422" y="48500"/>
+                </a:lnTo>
+                <a:lnTo>
+                  <a:pt x="2868275" y="49526"/>
+                </a:lnTo>
+                <a:lnTo>
+                  <a:pt x="2904128" y="50551"/>
+                </a:lnTo>
+                <a:lnTo>
+                  <a:pt x="2939982" y="51577"/>
+                </a:lnTo>
+                <a:lnTo>
+                  <a:pt x="2975835" y="52603"/>
+                </a:lnTo>
+                <a:lnTo>
+                  <a:pt x="3011689" y="53628"/>
+                </a:lnTo>
+                <a:lnTo>
+                  <a:pt x="3047542" y="54653"/>
+                </a:lnTo>
+                <a:lnTo>
+                  <a:pt x="3083396" y="55678"/>
+                </a:lnTo>
+                <a:lnTo>
+                  <a:pt x="3119249" y="56703"/>
+                </a:lnTo>
+                <a:lnTo>
+                  <a:pt x="3155103" y="57728"/>
+                </a:lnTo>
+                <a:lnTo>
+                  <a:pt x="3190956" y="58753"/>
+                </a:lnTo>
+                <a:lnTo>
+                  <a:pt x="3226809" y="59777"/>
+                </a:lnTo>
+                <a:lnTo>
+                  <a:pt x="3262663" y="60801"/>
+                </a:lnTo>
+                <a:lnTo>
+                  <a:pt x="3298516" y="61824"/>
+                </a:lnTo>
+                <a:lnTo>
+                  <a:pt x="3334370" y="62848"/>
+                </a:lnTo>
+                <a:lnTo>
+                  <a:pt x="3370223" y="63871"/>
+                </a:lnTo>
+                <a:lnTo>
+                  <a:pt x="3406077" y="64894"/>
+                </a:lnTo>
+                <a:lnTo>
+                  <a:pt x="3441930" y="65916"/>
+                </a:lnTo>
+                <a:lnTo>
+                  <a:pt x="3477784" y="66938"/>
+                </a:lnTo>
+                <a:lnTo>
+                  <a:pt x="3513637" y="67960"/>
+                </a:lnTo>
+                <a:lnTo>
+                  <a:pt x="3549490" y="68982"/>
+                </a:lnTo>
+                <a:lnTo>
+                  <a:pt x="3585344" y="70003"/>
+                </a:lnTo>
+                <a:lnTo>
+                  <a:pt x="3621197" y="71024"/>
+                </a:lnTo>
+                <a:lnTo>
+                  <a:pt x="3657051" y="72045"/>
+                </a:lnTo>
+                <a:lnTo>
+                  <a:pt x="3692904" y="73065"/>
+                </a:lnTo>
+                <a:lnTo>
+                  <a:pt x="3728758" y="74085"/>
+                </a:lnTo>
+                <a:lnTo>
+                  <a:pt x="3764611" y="75104"/>
+                </a:lnTo>
+                <a:lnTo>
+                  <a:pt x="3800464" y="76124"/>
+                </a:lnTo>
+                <a:lnTo>
+                  <a:pt x="3836318" y="77142"/>
+                </a:lnTo>
+                <a:lnTo>
+                  <a:pt x="3872171" y="78161"/>
+                </a:lnTo>
+                <a:lnTo>
+                  <a:pt x="3908025" y="79179"/>
+                </a:lnTo>
+                <a:lnTo>
+                  <a:pt x="3943878" y="80197"/>
+                </a:lnTo>
+                <a:lnTo>
+                  <a:pt x="3979732" y="81215"/>
+                </a:lnTo>
+                <a:lnTo>
+                  <a:pt x="4015585" y="82232"/>
+                </a:lnTo>
+                <a:lnTo>
+                  <a:pt x="4051439" y="83249"/>
+                </a:lnTo>
+                <a:lnTo>
+                  <a:pt x="4087292" y="84266"/>
+                </a:lnTo>
+                <a:lnTo>
+                  <a:pt x="4123145" y="85282"/>
+                </a:lnTo>
+                <a:lnTo>
+                  <a:pt x="4158999" y="86298"/>
+                </a:lnTo>
+                <a:lnTo>
+                  <a:pt x="4194852" y="87314"/>
+                </a:lnTo>
+                <a:lnTo>
+                  <a:pt x="4230706" y="88330"/>
+                </a:lnTo>
+                <a:lnTo>
+                  <a:pt x="4266559" y="89345"/>
+                </a:lnTo>
+                <a:lnTo>
+                  <a:pt x="4302413" y="90360"/>
+                </a:lnTo>
+                <a:lnTo>
+                  <a:pt x="4338266" y="91374"/>
+                </a:lnTo>
+                <a:lnTo>
+                  <a:pt x="4374120" y="92389"/>
+                </a:lnTo>
+                <a:lnTo>
+                  <a:pt x="4409973" y="93403"/>
+                </a:lnTo>
+                <a:lnTo>
+                  <a:pt x="4445826" y="94416"/>
+                </a:lnTo>
+                <a:lnTo>
+                  <a:pt x="4481680" y="95430"/>
+                </a:lnTo>
+                <a:lnTo>
+                  <a:pt x="4517533" y="96443"/>
+                </a:lnTo>
+                <a:lnTo>
+                  <a:pt x="4553387" y="97456"/>
+                </a:lnTo>
+                <a:lnTo>
+                  <a:pt x="4589240" y="98469"/>
+                </a:lnTo>
+                <a:lnTo>
+                  <a:pt x="4625094" y="99481"/>
+                </a:lnTo>
+                <a:lnTo>
+                  <a:pt x="4660947" y="100493"/>
+                </a:lnTo>
+                <a:lnTo>
+                  <a:pt x="4696801" y="101505"/>
+                </a:lnTo>
+                <a:lnTo>
+                  <a:pt x="4732654" y="102517"/>
+                </a:lnTo>
+                <a:lnTo>
+                  <a:pt x="4768507" y="103528"/>
+                </a:lnTo>
+                <a:lnTo>
+                  <a:pt x="4804361" y="104539"/>
+                </a:lnTo>
+                <a:lnTo>
+                  <a:pt x="4840214" y="105550"/>
+                </a:lnTo>
+                <a:lnTo>
+                  <a:pt x="4876068" y="106560"/>
+                </a:lnTo>
+                <a:lnTo>
+                  <a:pt x="4911921" y="107570"/>
+                </a:lnTo>
+                <a:lnTo>
+                  <a:pt x="4947775" y="108580"/>
+                </a:lnTo>
+                <a:lnTo>
+                  <a:pt x="4983628" y="109590"/>
+                </a:lnTo>
+                <a:lnTo>
+                  <a:pt x="5019482" y="110599"/>
+                </a:lnTo>
+                <a:lnTo>
+                  <a:pt x="5055335" y="111608"/>
+                </a:lnTo>
+                <a:lnTo>
+                  <a:pt x="5091188" y="112617"/>
+                </a:lnTo>
+                <a:lnTo>
+                  <a:pt x="5120639" y="113446"/>
+                </a:lnTo>
+              </a:path>
+            </a:pathLst>
+          </a:custGeom>
+          <a:noFill/>
+          <a:ln w="20320">
+            <a:solidFill>
+              <a:srgbClr val="FFFFFF"/>
+            </a:solidFill>
+            <a:prstDash val="dash"/>
+          </a:ln>
+          <a:effectLst/>
+        </p:spPr>
+        <p:txBody>
+          <a:bodyPr rtlCol="0" anchor="ctr"/>
+          <a:lstStyle/>
+          <a:p>
+            <a:pPr algn="ctr"/>
+          </a:p>
+        </p:txBody>
+      </p:sp>
+      <p:sp>
+        <p:nvSpPr>
+          <p:cNvPr id="73" name="C1-E10 text 71" descr="sci-ppt:o071"/>
           <p:cNvSpPr txBox="1"/>
           <p:nvPr/>
         </p:nvSpPr>
         <p:spPr>
           <a:xfrm>
-            <a:off x="1219200" y="3901440"/>
-            <a:ext cx="10363200" cy="377952"/>
+            <a:off x="6918960" y="1425549"/>
+            <a:ext cx="4846320" cy="216153"/>
           </a:xfrm>
           <a:prstGeom prst="rect">
             <a:avLst/>
@@ -3418,7 +7798,7 @@
           <a:effectLst/>
         </p:spPr>
         <p:txBody>
-          <a:bodyPr wrap="none" lIns="27432" rIns="27432" tIns="18288" bIns="18288" anchor="ctr">
+          <a:bodyPr wrap="none" lIns="18288" rIns="18288" tIns="18288" bIns="18288" anchor="t">
             <a:spAutoFit/>
           </a:bodyPr>
           <a:lstStyle/>
@@ -3429,27 +7809,107 @@
               </a:spcAft>
             </a:pPr>
             <a:r>
-              <a:rPr sz="1920" b="0" i="0">
+              <a:rPr sz="1100" b="0" i="0">
+                <a:solidFill>
+                  <a:srgbClr val="8EDBD4"/>
+                </a:solidFill>
+                <a:latin typeface="Arial"/>
+              </a:rPr>
+              <a:t>dKₗ/dt  (solid: finite difference; dashed: formula)</a:t>
+            </a:r>
+          </a:p>
+        </p:txBody>
+      </p:sp>
+      <p:sp>
+        <p:nvSpPr>
+          <p:cNvPr id="74" name="C1-E10 text 72" descr="sci-ppt:o072"/>
+          <p:cNvSpPr txBox="1"/>
+          <p:nvPr/>
+        </p:nvSpPr>
+        <p:spPr>
+          <a:xfrm>
+            <a:off x="6918960" y="4489704"/>
+            <a:ext cx="2743200" cy="223900"/>
+          </a:xfrm>
+          <a:prstGeom prst="rect">
+            <a:avLst/>
+          </a:prstGeom>
+          <a:noFill/>
+          <a:effectLst/>
+        </p:spPr>
+        <p:txBody>
+          <a:bodyPr wrap="none" lIns="18288" rIns="18288" tIns="18288" bIns="18288" anchor="t">
+            <a:spAutoFit/>
+          </a:bodyPr>
+          <a:lstStyle/>
+          <a:p>
+            <a:pPr algn="l">
+              <a:spcAft>
+                <a:spcPts val="0"/>
+              </a:spcAft>
+            </a:pPr>
+            <a:r>
+              <a:rPr sz="1150" b="0" i="0">
+                <a:solidFill>
+                  <a:srgbClr val="F28BA0"/>
+                </a:solidFill>
+                <a:latin typeface="Arial"/>
+              </a:rPr>
+              <a:t>dE_σ/dt = 8πσRṘ</a:t>
+            </a:r>
+          </a:p>
+        </p:txBody>
+      </p:sp>
+      <p:sp>
+        <p:nvSpPr>
+          <p:cNvPr id="75" name="C1-E10 text 73" descr="sci-ppt:o073"/>
+          <p:cNvSpPr txBox="1"/>
+          <p:nvPr/>
+        </p:nvSpPr>
+        <p:spPr>
+          <a:xfrm>
+            <a:off x="914400" y="5733288"/>
+            <a:ext cx="10881360" cy="247142"/>
+          </a:xfrm>
+          <a:prstGeom prst="rect">
+            <a:avLst/>
+          </a:prstGeom>
+          <a:noFill/>
+          <a:effectLst/>
+        </p:spPr>
+        <p:txBody>
+          <a:bodyPr wrap="none" lIns="18288" rIns="18288" tIns="18288" bIns="18288" anchor="t">
+            <a:spAutoFit/>
+          </a:bodyPr>
+          <a:lstStyle/>
+          <a:p>
+            <a:pPr algn="l">
+              <a:spcAft>
+                <a:spcPts val="0"/>
+              </a:spcAft>
+            </a:pPr>
+            <a:r>
+              <a:rPr sz="1300" b="0" i="0">
                 <a:solidFill>
                   <a:srgbClr val="E7F0F3"/>
                 </a:solidFill>
                 <a:latin typeface="Arial"/>
               </a:rPr>
-              <a:t>Storage can change sign; dissipation is nonnegative.</a:t>
-            </a:r>
-          </a:p>
-        </p:txBody>
-      </p:sp>
-      <p:sp>
-        <p:nvSpPr>
-          <p:cNvPr id="12" name="text11" descr="sci-ppt:C1-E10-011"/>
+              <a:t>dKₗ/dt = 4πR²Ṙ · ρ(RR̈ + 3Ṙ²/2) = V̇_b × (inertial pressure).  Formula and finite difference agree to 0.00 % of the peak.</a:t>
+            </a:r>
+          </a:p>
+        </p:txBody>
+      </p:sp>
+      <p:sp>
+        <p:nvSpPr>
+          <p:cNvPr id="76" name="C1-E10 text 74" descr="sci-ppt:o074"/>
           <p:cNvSpPr txBox="1"/>
           <p:nvPr/>
         </p:nvSpPr>
         <p:spPr>
           <a:xfrm>
-            <a:off x="365760" y="4974336"/>
-            <a:ext cx="5547360" cy="321259"/>
+            <a:off x="914400" y="6126480"/>
+            <a:ext cx="10881360" cy="247142"/>
           </a:xfrm>
           <a:prstGeom prst="rect">
             <a:avLst/>
@@ -3458,7 +7918,7 @@
           <a:effectLst/>
         </p:spPr>
         <p:txBody>
-          <a:bodyPr wrap="none" lIns="27432" rIns="27432" tIns="18288" bIns="18288" anchor="ctr">
+          <a:bodyPr wrap="none" lIns="18288" rIns="18288" tIns="18288" bIns="18288" anchor="t">
             <a:spAutoFit/>
           </a:bodyPr>
           <a:lstStyle/>
@@ -3469,27 +7929,27 @@
               </a:spcAft>
             </a:pPr>
             <a:r>
-              <a:rPr sz="1632" b="0" i="0">
+              <a:rPr sz="1300" b="0" i="0">
                 <a:solidFill>
-                  <a:srgbClr val="E7F0F3"/>
+                  <a:srgbClr val="F2B880"/>
                 </a:solidFill>
                 <a:latin typeface="Arial"/>
               </a:rPr>
-              <a:t>Kl</a:t>
-            </a:r>
-          </a:p>
-        </p:txBody>
-      </p:sp>
-      <p:sp>
-        <p:nvSpPr>
-          <p:cNvPr id="13" name="text12" descr="sci-ppt:C1-E10-012"/>
+              <a:t>The same V̇_b = 4πR²Ṙ multiplies every term: volume work is what couples kinetic storage, interface storage and dissipation.</a:t>
+            </a:r>
+          </a:p>
+        </p:txBody>
+      </p:sp>
+      <p:sp>
+        <p:nvSpPr>
+          <p:cNvPr id="77" name="C1-E10 text 75" descr="sci-ppt:o075"/>
           <p:cNvSpPr txBox="1"/>
           <p:nvPr/>
         </p:nvSpPr>
         <p:spPr>
           <a:xfrm>
-            <a:off x="365760" y="5266944"/>
-            <a:ext cx="5547360" cy="321259"/>
+            <a:off x="320040" y="6510528"/>
+            <a:ext cx="11521440" cy="200660"/>
           </a:xfrm>
           <a:prstGeom prst="rect">
             <a:avLst/>
@@ -3498,7 +7958,7 @@
           <a:effectLst/>
         </p:spPr>
         <p:txBody>
-          <a:bodyPr wrap="none" lIns="27432" rIns="27432" tIns="18288" bIns="18288" anchor="ctr">
+          <a:bodyPr wrap="none" lIns="18288" rIns="18288" tIns="18288" bIns="18288" anchor="t">
             <a:spAutoFit/>
           </a:bodyPr>
           <a:lstStyle/>
@@ -3509,413 +7969,13 @@
               </a:spcAft>
             </a:pPr>
             <a:r>
-              <a:rPr sz="1632" b="0" i="0">
-                <a:solidFill>
-                  <a:srgbClr val="E7F0F3"/>
-                </a:solidFill>
-                <a:latin typeface="Arial"/>
-              </a:rPr>
-              <a:t>Vb</a:t>
-            </a:r>
-          </a:p>
-        </p:txBody>
-      </p:sp>
-      <p:sp>
-        <p:nvSpPr>
-          <p:cNvPr id="14" name="text13" descr="sci-ppt:C1-E10-013"/>
-          <p:cNvSpPr txBox="1"/>
-          <p:nvPr/>
-        </p:nvSpPr>
-        <p:spPr>
-          <a:xfrm>
-            <a:off x="365760" y="5559552"/>
-            <a:ext cx="5547360" cy="321259"/>
-          </a:xfrm>
-          <a:prstGeom prst="rect">
-            <a:avLst/>
-          </a:prstGeom>
-          <a:noFill/>
-          <a:effectLst/>
-        </p:spPr>
-        <p:txBody>
-          <a:bodyPr wrap="none" lIns="27432" rIns="27432" tIns="18288" bIns="18288" anchor="ctr">
-            <a:spAutoFit/>
-          </a:bodyPr>
-          <a:lstStyle/>
-          <a:p>
-            <a:pPr algn="l">
-              <a:spcAft>
-                <a:spcPts val="0"/>
-              </a:spcAft>
-            </a:pPr>
-            <a:r>
-              <a:rPr sz="1632" b="0" i="0">
-                <a:solidFill>
-                  <a:srgbClr val="E7F0F3"/>
-                </a:solidFill>
-                <a:latin typeface="Arial"/>
-              </a:rPr>
-              <a:t>R</a:t>
-            </a:r>
-          </a:p>
-        </p:txBody>
-      </p:sp>
-      <p:sp>
-        <p:nvSpPr>
-          <p:cNvPr id="15" name="text14" descr="sci-ppt:C1-E10-014"/>
-          <p:cNvSpPr txBox="1"/>
-          <p:nvPr/>
-        </p:nvSpPr>
-        <p:spPr>
-          <a:xfrm>
-            <a:off x="365760" y="5852160"/>
-            <a:ext cx="5547360" cy="321259"/>
-          </a:xfrm>
-          <a:prstGeom prst="rect">
-            <a:avLst/>
-          </a:prstGeom>
-          <a:noFill/>
-          <a:effectLst/>
-        </p:spPr>
-        <p:txBody>
-          <a:bodyPr wrap="none" lIns="27432" rIns="27432" tIns="18288" bIns="18288" anchor="ctr">
-            <a:spAutoFit/>
-          </a:bodyPr>
-          <a:lstStyle/>
-          <a:p>
-            <a:pPr algn="l">
-              <a:spcAft>
-                <a:spcPts val="0"/>
-              </a:spcAft>
-            </a:pPr>
-            <a:r>
-              <a:rPr sz="1632" b="0" i="0">
-                <a:solidFill>
-                  <a:srgbClr val="E7F0F3"/>
-                </a:solidFill>
-                <a:latin typeface="Arial"/>
-              </a:rPr>
-              <a:t>R̈</a:t>
-            </a:r>
-          </a:p>
-        </p:txBody>
-      </p:sp>
-      <p:sp>
-        <p:nvSpPr>
-          <p:cNvPr id="16" name="text15" descr="sci-ppt:C1-E10-015"/>
-          <p:cNvSpPr txBox="1"/>
-          <p:nvPr/>
-        </p:nvSpPr>
-        <p:spPr>
-          <a:xfrm>
-            <a:off x="365760" y="6144768"/>
-            <a:ext cx="5547360" cy="321259"/>
-          </a:xfrm>
-          <a:prstGeom prst="rect">
-            <a:avLst/>
-          </a:prstGeom>
-          <a:noFill/>
-          <a:effectLst/>
-        </p:spPr>
-        <p:txBody>
-          <a:bodyPr wrap="none" lIns="27432" rIns="27432" tIns="18288" bIns="18288" anchor="ctr">
-            <a:spAutoFit/>
-          </a:bodyPr>
-          <a:lstStyle/>
-          <a:p>
-            <a:pPr algn="l">
-              <a:spcAft>
-                <a:spcPts val="0"/>
-              </a:spcAft>
-            </a:pPr>
-            <a:r>
-              <a:rPr sz="1632" b="0" i="0">
-                <a:solidFill>
-                  <a:srgbClr val="E7F0F3"/>
-                </a:solidFill>
-                <a:latin typeface="Arial"/>
-              </a:rPr>
-              <a:t>σ</a:t>
-            </a:r>
-          </a:p>
-        </p:txBody>
-      </p:sp>
-      <p:sp>
-        <p:nvSpPr>
-          <p:cNvPr id="17" name="text16" descr="sci-ppt:C1-E10-016"/>
-          <p:cNvSpPr txBox="1"/>
-          <p:nvPr/>
-        </p:nvSpPr>
-        <p:spPr>
-          <a:xfrm>
-            <a:off x="6156960" y="4974336"/>
-            <a:ext cx="5547360" cy="321259"/>
-          </a:xfrm>
-          <a:prstGeom prst="rect">
-            <a:avLst/>
-          </a:prstGeom>
-          <a:noFill/>
-          <a:effectLst/>
-        </p:spPr>
-        <p:txBody>
-          <a:bodyPr wrap="none" lIns="27432" rIns="27432" tIns="18288" bIns="18288" anchor="ctr">
-            <a:spAutoFit/>
-          </a:bodyPr>
-          <a:lstStyle/>
-          <a:p>
-            <a:pPr algn="l">
-              <a:spcAft>
-                <a:spcPts val="0"/>
-              </a:spcAft>
-            </a:pPr>
-            <a:r>
-              <a:rPr sz="1632" b="0" i="0">
-                <a:solidFill>
-                  <a:srgbClr val="E7F0F3"/>
-                </a:solidFill>
-                <a:latin typeface="Arial"/>
-              </a:rPr>
-              <a:t>Eσ</a:t>
-            </a:r>
-          </a:p>
-        </p:txBody>
-      </p:sp>
-      <p:sp>
-        <p:nvSpPr>
-          <p:cNvPr id="18" name="text17" descr="sci-ppt:C1-E10-017"/>
-          <p:cNvSpPr txBox="1"/>
-          <p:nvPr/>
-        </p:nvSpPr>
-        <p:spPr>
-          <a:xfrm>
-            <a:off x="6156960" y="5266944"/>
-            <a:ext cx="5547360" cy="321259"/>
-          </a:xfrm>
-          <a:prstGeom prst="rect">
-            <a:avLst/>
-          </a:prstGeom>
-          <a:noFill/>
-          <a:effectLst/>
-        </p:spPr>
-        <p:txBody>
-          <a:bodyPr wrap="none" lIns="27432" rIns="27432" tIns="18288" bIns="18288" anchor="ctr">
-            <a:spAutoFit/>
-          </a:bodyPr>
-          <a:lstStyle/>
-          <a:p>
-            <a:pPr algn="l">
-              <a:spcAft>
-                <a:spcPts val="0"/>
-              </a:spcAft>
-            </a:pPr>
-            <a:r>
-              <a:rPr sz="1632" b="0" i="0">
-                <a:solidFill>
-                  <a:srgbClr val="E7F0F3"/>
-                </a:solidFill>
-                <a:latin typeface="Arial"/>
-              </a:rPr>
-              <a:t>V̇b</a:t>
-            </a:r>
-          </a:p>
-        </p:txBody>
-      </p:sp>
-      <p:sp>
-        <p:nvSpPr>
-          <p:cNvPr id="19" name="text18" descr="sci-ppt:C1-E10-018"/>
-          <p:cNvSpPr txBox="1"/>
-          <p:nvPr/>
-        </p:nvSpPr>
-        <p:spPr>
-          <a:xfrm>
-            <a:off x="6156960" y="5559552"/>
-            <a:ext cx="5547360" cy="321259"/>
-          </a:xfrm>
-          <a:prstGeom prst="rect">
-            <a:avLst/>
-          </a:prstGeom>
-          <a:noFill/>
-          <a:effectLst/>
-        </p:spPr>
-        <p:txBody>
-          <a:bodyPr wrap="none" lIns="27432" rIns="27432" tIns="18288" bIns="18288" anchor="ctr">
-            <a:spAutoFit/>
-          </a:bodyPr>
-          <a:lstStyle/>
-          <a:p>
-            <a:pPr algn="l">
-              <a:spcAft>
-                <a:spcPts val="0"/>
-              </a:spcAft>
-            </a:pPr>
-            <a:r>
-              <a:rPr sz="1632" b="0" i="0">
-                <a:solidFill>
-                  <a:srgbClr val="E7F0F3"/>
-                </a:solidFill>
-                <a:latin typeface="Arial"/>
-              </a:rPr>
-              <a:t>Ṙ</a:t>
-            </a:r>
-          </a:p>
-        </p:txBody>
-      </p:sp>
-      <p:sp>
-        <p:nvSpPr>
-          <p:cNvPr id="20" name="text19" descr="sci-ppt:C1-E10-019"/>
-          <p:cNvSpPr txBox="1"/>
-          <p:nvPr/>
-        </p:nvSpPr>
-        <p:spPr>
-          <a:xfrm>
-            <a:off x="6156960" y="5852160"/>
-            <a:ext cx="5547360" cy="321259"/>
-          </a:xfrm>
-          <a:prstGeom prst="rect">
-            <a:avLst/>
-          </a:prstGeom>
-          <a:noFill/>
-          <a:effectLst/>
-        </p:spPr>
-        <p:txBody>
-          <a:bodyPr wrap="none" lIns="27432" rIns="27432" tIns="18288" bIns="18288" anchor="ctr">
-            <a:spAutoFit/>
-          </a:bodyPr>
-          <a:lstStyle/>
-          <a:p>
-            <a:pPr algn="l">
-              <a:spcAft>
-                <a:spcPts val="0"/>
-              </a:spcAft>
-            </a:pPr>
-            <a:r>
-              <a:rPr sz="1632" b="0" i="0">
-                <a:solidFill>
-                  <a:srgbClr val="E7F0F3"/>
-                </a:solidFill>
-                <a:latin typeface="Arial"/>
-              </a:rPr>
-              <a:t>ρ</a:t>
-            </a:r>
-          </a:p>
-        </p:txBody>
-      </p:sp>
-      <p:sp>
-        <p:nvSpPr>
-          <p:cNvPr id="21" name="text20" descr="sci-ppt:C1-E10-020"/>
-          <p:cNvSpPr txBox="1"/>
-          <p:nvPr/>
-        </p:nvSpPr>
-        <p:spPr>
-          <a:xfrm>
-            <a:off x="6156960" y="6144768"/>
-            <a:ext cx="5547360" cy="321259"/>
-          </a:xfrm>
-          <a:prstGeom prst="rect">
-            <a:avLst/>
-          </a:prstGeom>
-          <a:noFill/>
-          <a:effectLst/>
-        </p:spPr>
-        <p:txBody>
-          <a:bodyPr wrap="none" lIns="27432" rIns="27432" tIns="18288" bIns="18288" anchor="ctr">
-            <a:spAutoFit/>
-          </a:bodyPr>
-          <a:lstStyle/>
-          <a:p>
-            <a:pPr algn="l">
-              <a:spcAft>
-                <a:spcPts val="0"/>
-              </a:spcAft>
-            </a:pPr>
-            <a:r>
-              <a:rPr sz="1632" b="0" i="0">
-                <a:solidFill>
-                  <a:srgbClr val="E7F0F3"/>
-                </a:solidFill>
-                <a:latin typeface="Arial"/>
-              </a:rPr>
-              <a:t>t</a:t>
-            </a:r>
-          </a:p>
-        </p:txBody>
-      </p:sp>
-      <p:sp>
-        <p:nvSpPr>
-          <p:cNvPr id="22" name="text21" descr="sci-ppt:C1-E10-021"/>
-          <p:cNvSpPr txBox="1"/>
-          <p:nvPr/>
-        </p:nvSpPr>
-        <p:spPr>
-          <a:xfrm>
-            <a:off x="365760" y="6632448"/>
-            <a:ext cx="11277600" cy="302361"/>
-          </a:xfrm>
-          <a:prstGeom prst="rect">
-            <a:avLst/>
-          </a:prstGeom>
-          <a:noFill/>
-          <a:effectLst/>
-        </p:spPr>
-        <p:txBody>
-          <a:bodyPr wrap="none" lIns="27432" rIns="27432" tIns="18288" bIns="18288" anchor="ctr">
-            <a:spAutoFit/>
-          </a:bodyPr>
-          <a:lstStyle/>
-          <a:p>
-            <a:pPr algn="l">
-              <a:spcAft>
-                <a:spcPts val="0"/>
-              </a:spcAft>
-            </a:pPr>
-            <a:r>
-              <a:rPr sz="1536" b="0" i="0">
+              <a:rPr sz="1000" b="0" i="0">
                 <a:solidFill>
                   <a:srgbClr val="B4C7D2"/>
                 </a:solidFill>
                 <a:latin typeface="Arial"/>
               </a:rPr>
-              <a:t>Surface energy is stored at the spherical boundary</a:t>
-            </a:r>
-          </a:p>
-        </p:txBody>
-      </p:sp>
-      <p:sp>
-        <p:nvSpPr>
-          <p:cNvPr id="23" name="text22" descr="sci-ppt:C1-E10-022"/>
-          <p:cNvSpPr txBox="1"/>
-          <p:nvPr/>
-        </p:nvSpPr>
-        <p:spPr>
-          <a:xfrm>
-            <a:off x="365760" y="6925056"/>
-            <a:ext cx="11277600" cy="302361"/>
-          </a:xfrm>
-          <a:prstGeom prst="rect">
-            <a:avLst/>
-          </a:prstGeom>
-          <a:noFill/>
-          <a:effectLst/>
-        </p:spPr>
-        <p:txBody>
-          <a:bodyPr wrap="none" lIns="27432" rIns="27432" tIns="18288" bIns="18288" anchor="ctr">
-            <a:spAutoFit/>
-          </a:bodyPr>
-          <a:lstStyle/>
-          <a:p>
-            <a:pPr algn="l">
-              <a:spcAft>
-                <a:spcPts val="0"/>
-              </a:spcAft>
-            </a:pPr>
-            <a:r>
-              <a:rPr sz="1536" b="0" i="0">
-                <a:solidFill>
-                  <a:srgbClr val="B4C7D2"/>
-                </a:solidFill>
-                <a:latin typeface="Arial"/>
-              </a:rPr>
-              <a:t>Volume work changes both liquid speed and effective inertia</a:t>
+              <a:t>Rayleigh–Plesset solution (R₀ = 5 µm, p_g0 = 1 MPa, γ = 1.4, σ = 0.072 N/m, μ = 1 mPa·s) differentiated with the product rule of Eq. C1-E10.</a:t>
             </a:r>
           </a:p>
         </p:txBody>
